--- a/Лр2_С Буланый Дышлевая.pptx
+++ b/Лр2_С Буланый Дышлевая.pptx
@@ -5,29 +5,28 @@
     <p:sldMasterId id="2147483648" r:id="rId1"/>
   </p:sldMasterIdLst>
   <p:notesMasterIdLst>
-    <p:notesMasterId r:id="rId22"/>
+    <p:notesMasterId r:id="rId21"/>
   </p:notesMasterIdLst>
   <p:sldIdLst>
     <p:sldId id="256" r:id="rId2"/>
     <p:sldId id="290" r:id="rId3"/>
-    <p:sldId id="316" r:id="rId4"/>
-    <p:sldId id="317" r:id="rId5"/>
-    <p:sldId id="318" r:id="rId6"/>
-    <p:sldId id="319" r:id="rId7"/>
-    <p:sldId id="320" r:id="rId8"/>
-    <p:sldId id="321" r:id="rId9"/>
-    <p:sldId id="322" r:id="rId10"/>
-    <p:sldId id="323" r:id="rId11"/>
-    <p:sldId id="324" r:id="rId12"/>
-    <p:sldId id="325" r:id="rId13"/>
-    <p:sldId id="326" r:id="rId14"/>
-    <p:sldId id="327" r:id="rId15"/>
-    <p:sldId id="328" r:id="rId16"/>
-    <p:sldId id="329" r:id="rId17"/>
-    <p:sldId id="330" r:id="rId18"/>
-    <p:sldId id="279" r:id="rId19"/>
-    <p:sldId id="280" r:id="rId20"/>
-    <p:sldId id="275" r:id="rId21"/>
+    <p:sldId id="317" r:id="rId4"/>
+    <p:sldId id="318" r:id="rId5"/>
+    <p:sldId id="319" r:id="rId6"/>
+    <p:sldId id="320" r:id="rId7"/>
+    <p:sldId id="321" r:id="rId8"/>
+    <p:sldId id="322" r:id="rId9"/>
+    <p:sldId id="323" r:id="rId10"/>
+    <p:sldId id="324" r:id="rId11"/>
+    <p:sldId id="325" r:id="rId12"/>
+    <p:sldId id="326" r:id="rId13"/>
+    <p:sldId id="327" r:id="rId14"/>
+    <p:sldId id="328" r:id="rId15"/>
+    <p:sldId id="329" r:id="rId16"/>
+    <p:sldId id="330" r:id="rId17"/>
+    <p:sldId id="279" r:id="rId18"/>
+    <p:sldId id="280" r:id="rId19"/>
+    <p:sldId id="275" r:id="rId20"/>
   </p:sldIdLst>
   <p:sldSz cx="12192000" cy="6858000"/>
   <p:notesSz cx="6858000" cy="9144000"/>
@@ -216,7 +215,7 @@
           <a:p>
             <a:fld id="{55B5F127-EF7C-4D16-B460-0CE257C7E17B}" type="datetimeFigureOut">
               <a:rPr lang="ru-RU" smtClean="0"/>
-              <a:t>19.02.2026</a:t>
+              <a:t>26.02.2026</a:t>
             </a:fld>
             <a:endParaRPr lang="ru-RU"/>
           </a:p>
@@ -818,7 +817,7 @@
           <a:p>
             <a:fld id="{573E719D-693B-4A77-84DB-9E8C1D23A8C1}" type="datetime1">
               <a:rPr lang="ru-RU" smtClean="0"/>
-              <a:t>19.02.2026</a:t>
+              <a:t>26.02.2026</a:t>
             </a:fld>
             <a:endParaRPr lang="ru-RU"/>
           </a:p>
@@ -986,7 +985,7 @@
           <a:p>
             <a:fld id="{38D815C9-C4A9-460B-9F3D-D5B099F812AA}" type="datetime1">
               <a:rPr lang="ru-RU" smtClean="0"/>
-              <a:t>19.02.2026</a:t>
+              <a:t>26.02.2026</a:t>
             </a:fld>
             <a:endParaRPr lang="ru-RU"/>
           </a:p>
@@ -1164,7 +1163,7 @@
           <a:p>
             <a:fld id="{8FAECA59-152E-4437-ADB5-E4AD6E9B3A47}" type="datetime1">
               <a:rPr lang="ru-RU" smtClean="0"/>
-              <a:t>19.02.2026</a:t>
+              <a:t>26.02.2026</a:t>
             </a:fld>
             <a:endParaRPr lang="ru-RU"/>
           </a:p>
@@ -1332,7 +1331,7 @@
           <a:p>
             <a:fld id="{541E3134-B3F2-4317-B871-B88FB4A00131}" type="datetime1">
               <a:rPr lang="ru-RU" smtClean="0"/>
-              <a:t>19.02.2026</a:t>
+              <a:t>26.02.2026</a:t>
             </a:fld>
             <a:endParaRPr lang="ru-RU"/>
           </a:p>
@@ -1577,7 +1576,7 @@
           <a:p>
             <a:fld id="{FF7788A9-13F1-4F40-8019-093569E6E3EF}" type="datetime1">
               <a:rPr lang="ru-RU" smtClean="0"/>
-              <a:t>19.02.2026</a:t>
+              <a:t>26.02.2026</a:t>
             </a:fld>
             <a:endParaRPr lang="ru-RU"/>
           </a:p>
@@ -1806,7 +1805,7 @@
           <a:p>
             <a:fld id="{31B97AA0-6125-4875-A987-6C4FF4B5CE30}" type="datetime1">
               <a:rPr lang="ru-RU" smtClean="0"/>
-              <a:t>19.02.2026</a:t>
+              <a:t>26.02.2026</a:t>
             </a:fld>
             <a:endParaRPr lang="ru-RU"/>
           </a:p>
@@ -2170,7 +2169,7 @@
           <a:p>
             <a:fld id="{AF790800-C1F3-441D-AFE3-704E247D4095}" type="datetime1">
               <a:rPr lang="ru-RU" smtClean="0"/>
-              <a:t>19.02.2026</a:t>
+              <a:t>26.02.2026</a:t>
             </a:fld>
             <a:endParaRPr lang="ru-RU"/>
           </a:p>
@@ -2287,7 +2286,7 @@
           <a:p>
             <a:fld id="{3B8DE1E7-2FCF-4D15-B644-3CE192867603}" type="datetime1">
               <a:rPr lang="ru-RU" smtClean="0"/>
-              <a:t>19.02.2026</a:t>
+              <a:t>26.02.2026</a:t>
             </a:fld>
             <a:endParaRPr lang="ru-RU"/>
           </a:p>
@@ -2382,7 +2381,7 @@
           <a:p>
             <a:fld id="{7B69D6F9-9522-4E0E-B764-D722A322B6E0}" type="datetime1">
               <a:rPr lang="ru-RU" smtClean="0"/>
-              <a:t>19.02.2026</a:t>
+              <a:t>26.02.2026</a:t>
             </a:fld>
             <a:endParaRPr lang="ru-RU"/>
           </a:p>
@@ -2657,7 +2656,7 @@
           <a:p>
             <a:fld id="{2E60F34C-B6D8-4D1D-84D8-54213C78C279}" type="datetime1">
               <a:rPr lang="ru-RU" smtClean="0"/>
-              <a:t>19.02.2026</a:t>
+              <a:t>26.02.2026</a:t>
             </a:fld>
             <a:endParaRPr lang="ru-RU"/>
           </a:p>
@@ -2909,7 +2908,7 @@
           <a:p>
             <a:fld id="{6959A17E-64F2-46E8-BAC1-CFD826F028E0}" type="datetime1">
               <a:rPr lang="ru-RU" smtClean="0"/>
-              <a:t>19.02.2026</a:t>
+              <a:t>26.02.2026</a:t>
             </a:fld>
             <a:endParaRPr lang="ru-RU"/>
           </a:p>
@@ -3120,7 +3119,7 @@
           <a:p>
             <a:fld id="{72A24392-178F-4638-9B43-936544BC9B5A}" type="datetime1">
               <a:rPr lang="ru-RU" smtClean="0"/>
-              <a:t>19.02.2026</a:t>
+              <a:t>26.02.2026</a:t>
             </a:fld>
             <a:endParaRPr lang="ru-RU"/>
           </a:p>
@@ -3571,7 +3570,7 @@
         <p:spPr>
           <a:xfrm>
             <a:off x="706581" y="2126746"/>
-            <a:ext cx="4826000" cy="1200329"/>
+            <a:ext cx="4826000" cy="461665"/>
           </a:xfrm>
           <a:prstGeom prst="rect">
             <a:avLst/>
@@ -3596,7 +3595,7 @@
                 <a:ea typeface="Tahoma" panose="020B0604030504040204" pitchFamily="34" charset="0"/>
                 <a:cs typeface="Tahoma" panose="020B0604030504040204" pitchFamily="34" charset="0"/>
               </a:rPr>
-              <a:t>Сравнение энтропии неупакованного и упакованного файлов</a:t>
+              <a:t>Лабораторная №2</a:t>
             </a:r>
           </a:p>
         </p:txBody>
@@ -3676,1053 +3675,6 @@
 </file>
 
 <file path=ppt/slides/slide10.xml><?xml version="1.0" encoding="utf-8"?>
-<p:sld xmlns:a="http://schemas.openxmlformats.org/drawingml/2006/main" xmlns:r="http://schemas.openxmlformats.org/officeDocument/2006/relationships" xmlns:p="http://schemas.openxmlformats.org/presentationml/2006/main">
-  <p:cSld>
-    <p:spTree>
-      <p:nvGrpSpPr>
-        <p:cNvPr id="1" name="">
-          <a:extLst>
-            <a:ext uri="{FF2B5EF4-FFF2-40B4-BE49-F238E27FC236}">
-              <a16:creationId xmlns:a16="http://schemas.microsoft.com/office/drawing/2014/main" id="{F1AEF9CA-D7BE-49E5-2F16-6D5F93AB9368}"/>
-            </a:ext>
-          </a:extLst>
-        </p:cNvPr>
-        <p:cNvGrpSpPr/>
-        <p:nvPr/>
-      </p:nvGrpSpPr>
-      <p:grpSpPr>
-        <a:xfrm>
-          <a:off x="0" y="0"/>
-          <a:ext cx="0" cy="0"/>
-          <a:chOff x="0" y="0"/>
-          <a:chExt cx="0" cy="0"/>
-        </a:xfrm>
-      </p:grpSpPr>
-      <p:graphicFrame>
-        <p:nvGraphicFramePr>
-          <p:cNvPr id="10" name="Таблица 9">
-            <a:extLst>
-              <a:ext uri="{FF2B5EF4-FFF2-40B4-BE49-F238E27FC236}">
-                <a16:creationId xmlns:a16="http://schemas.microsoft.com/office/drawing/2014/main" id="{E8B97E1D-7C40-D674-A766-1BD510F1BA32}"/>
-              </a:ext>
-            </a:extLst>
-          </p:cNvPr>
-          <p:cNvGraphicFramePr>
-            <a:graphicFrameLocks noGrp="1"/>
-          </p:cNvGraphicFramePr>
-          <p:nvPr>
-            <p:extLst>
-              <p:ext uri="{D42A27DB-BD31-4B8C-83A1-F6EECF244321}">
-                <p14:modId xmlns:p14="http://schemas.microsoft.com/office/powerpoint/2010/main" val="712024485"/>
-              </p:ext>
-            </p:extLst>
-          </p:nvPr>
-        </p:nvGraphicFramePr>
-        <p:xfrm>
-          <a:off x="8839325" y="2780940"/>
-          <a:ext cx="2828133" cy="461287"/>
-        </p:xfrm>
-        <a:graphic>
-          <a:graphicData uri="http://schemas.openxmlformats.org/drawingml/2006/table">
-            <a:tbl>
-              <a:tblPr firstRow="1" bandRow="1">
-                <a:tableStyleId>{5C22544A-7EE6-4342-B048-85BDC9FD1C3A}</a:tableStyleId>
-              </a:tblPr>
-              <a:tblGrid>
-                <a:gridCol w="1269016">
-                  <a:extLst>
-                    <a:ext uri="{9D8B030D-6E8A-4147-A177-3AD203B41FA5}">
-                      <a16:colId xmlns:a16="http://schemas.microsoft.com/office/drawing/2014/main" val="3852776436"/>
-                    </a:ext>
-                  </a:extLst>
-                </a:gridCol>
-                <a:gridCol w="1559117">
-                  <a:extLst>
-                    <a:ext uri="{9D8B030D-6E8A-4147-A177-3AD203B41FA5}">
-                      <a16:colId xmlns:a16="http://schemas.microsoft.com/office/drawing/2014/main" val="1792951911"/>
-                    </a:ext>
-                  </a:extLst>
-                </a:gridCol>
-              </a:tblGrid>
-              <a:tr h="461287">
-                <a:tc>
-                  <a:txBody>
-                    <a:bodyPr/>
-                    <a:lstStyle/>
-                    <a:p>
-                      <a:pPr algn="ctr"/>
-                      <a:r>
-                        <a:rPr lang="ru-RU" dirty="0">
-                          <a:solidFill>
-                            <a:schemeClr val="tx1"/>
-                          </a:solidFill>
-                        </a:rPr>
-                        <a:t>Размер</a:t>
-                      </a:r>
-                    </a:p>
-                  </a:txBody>
-                  <a:tcPr anchor="ctr">
-                    <a:lnL w="12700" cap="flat" cmpd="sng" algn="ctr">
-                      <a:solidFill>
-                        <a:schemeClr val="tx1"/>
-                      </a:solidFill>
-                      <a:prstDash val="solid"/>
-                      <a:round/>
-                      <a:headEnd type="none" w="med" len="med"/>
-                      <a:tailEnd type="none" w="med" len="med"/>
-                    </a:lnL>
-                    <a:lnR w="12700" cap="flat" cmpd="sng" algn="ctr">
-                      <a:solidFill>
-                        <a:schemeClr val="tx1"/>
-                      </a:solidFill>
-                      <a:prstDash val="solid"/>
-                      <a:round/>
-                      <a:headEnd type="none" w="med" len="med"/>
-                      <a:tailEnd type="none" w="med" len="med"/>
-                    </a:lnR>
-                    <a:lnT w="12700" cap="flat" cmpd="sng" algn="ctr">
-                      <a:solidFill>
-                        <a:schemeClr val="tx1"/>
-                      </a:solidFill>
-                      <a:prstDash val="solid"/>
-                      <a:round/>
-                      <a:headEnd type="none" w="med" len="med"/>
-                      <a:tailEnd type="none" w="med" len="med"/>
-                    </a:lnT>
-                    <a:lnB w="12700" cap="flat" cmpd="sng" algn="ctr">
-                      <a:solidFill>
-                        <a:schemeClr val="tx1"/>
-                      </a:solidFill>
-                      <a:prstDash val="solid"/>
-                      <a:round/>
-                      <a:headEnd type="none" w="med" len="med"/>
-                      <a:tailEnd type="none" w="med" len="med"/>
-                    </a:lnB>
-                    <a:lnTlToBr w="12700" cmpd="sng">
-                      <a:noFill/>
-                      <a:prstDash val="solid"/>
-                    </a:lnTlToBr>
-                    <a:lnBlToTr w="12700" cmpd="sng">
-                      <a:noFill/>
-                      <a:prstDash val="solid"/>
-                    </a:lnBlToTr>
-                    <a:solidFill>
-                      <a:schemeClr val="bg1"/>
-                    </a:solidFill>
-                  </a:tcPr>
-                </a:tc>
-                <a:tc>
-                  <a:txBody>
-                    <a:bodyPr/>
-                    <a:lstStyle/>
-                    <a:p>
-                      <a:pPr marL="0" marR="0" lvl="0" indent="0" algn="ctr" defTabSz="914400" rtl="0" eaLnBrk="1" fontAlgn="auto" latinLnBrk="0" hangingPunct="1">
-                        <a:lnSpc>
-                          <a:spcPct val="100000"/>
-                        </a:lnSpc>
-                        <a:spcBef>
-                          <a:spcPts val="0"/>
-                        </a:spcBef>
-                        <a:spcAft>
-                          <a:spcPts val="0"/>
-                        </a:spcAft>
-                        <a:buClrTx/>
-                        <a:buSzTx/>
-                        <a:buFontTx/>
-                        <a:buNone/>
-                        <a:tabLst/>
-                        <a:defRPr/>
-                      </a:pPr>
-                      <a:r>
-                        <a:rPr lang="ru-RU" dirty="0">
-                          <a:solidFill>
-                            <a:schemeClr val="tx1"/>
-                          </a:solidFill>
-                        </a:rPr>
-                        <a:t>73 Кб</a:t>
-                      </a:r>
-                    </a:p>
-                  </a:txBody>
-                  <a:tcPr anchor="ctr">
-                    <a:lnL w="12700" cap="flat" cmpd="sng" algn="ctr">
-                      <a:solidFill>
-                        <a:schemeClr val="tx1"/>
-                      </a:solidFill>
-                      <a:prstDash val="solid"/>
-                      <a:round/>
-                      <a:headEnd type="none" w="med" len="med"/>
-                      <a:tailEnd type="none" w="med" len="med"/>
-                    </a:lnL>
-                    <a:lnR w="12700" cap="flat" cmpd="sng" algn="ctr">
-                      <a:solidFill>
-                        <a:schemeClr val="tx1"/>
-                      </a:solidFill>
-                      <a:prstDash val="solid"/>
-                      <a:round/>
-                      <a:headEnd type="none" w="med" len="med"/>
-                      <a:tailEnd type="none" w="med" len="med"/>
-                    </a:lnR>
-                    <a:lnT w="12700" cap="flat" cmpd="sng" algn="ctr">
-                      <a:solidFill>
-                        <a:schemeClr val="tx1"/>
-                      </a:solidFill>
-                      <a:prstDash val="solid"/>
-                      <a:round/>
-                      <a:headEnd type="none" w="med" len="med"/>
-                      <a:tailEnd type="none" w="med" len="med"/>
-                    </a:lnT>
-                    <a:lnB w="12700" cap="flat" cmpd="sng" algn="ctr">
-                      <a:solidFill>
-                        <a:schemeClr val="tx1"/>
-                      </a:solidFill>
-                      <a:prstDash val="solid"/>
-                      <a:round/>
-                      <a:headEnd type="none" w="med" len="med"/>
-                      <a:tailEnd type="none" w="med" len="med"/>
-                    </a:lnB>
-                    <a:lnTlToBr w="12700" cmpd="sng">
-                      <a:noFill/>
-                      <a:prstDash val="solid"/>
-                    </a:lnTlToBr>
-                    <a:lnBlToTr w="12700" cmpd="sng">
-                      <a:noFill/>
-                      <a:prstDash val="solid"/>
-                    </a:lnBlToTr>
-                    <a:solidFill>
-                      <a:schemeClr val="bg1"/>
-                    </a:solidFill>
-                  </a:tcPr>
-                </a:tc>
-                <a:extLst>
-                  <a:ext uri="{0D108BD9-81ED-4DB2-BD59-A6C34878D82A}">
-                    <a16:rowId xmlns:a16="http://schemas.microsoft.com/office/drawing/2014/main" val="1488891872"/>
-                  </a:ext>
-                </a:extLst>
-              </a:tr>
-            </a:tbl>
-          </a:graphicData>
-        </a:graphic>
-      </p:graphicFrame>
-      <p:graphicFrame>
-        <p:nvGraphicFramePr>
-          <p:cNvPr id="11" name="Таблица 10">
-            <a:extLst>
-              <a:ext uri="{FF2B5EF4-FFF2-40B4-BE49-F238E27FC236}">
-                <a16:creationId xmlns:a16="http://schemas.microsoft.com/office/drawing/2014/main" id="{138E18FB-F347-270D-116B-3E99839544EF}"/>
-              </a:ext>
-            </a:extLst>
-          </p:cNvPr>
-          <p:cNvGraphicFramePr>
-            <a:graphicFrameLocks noGrp="1"/>
-          </p:cNvGraphicFramePr>
-          <p:nvPr>
-            <p:extLst>
-              <p:ext uri="{D42A27DB-BD31-4B8C-83A1-F6EECF244321}">
-                <p14:modId xmlns:p14="http://schemas.microsoft.com/office/powerpoint/2010/main" val="2039856514"/>
-              </p:ext>
-            </p:extLst>
-          </p:nvPr>
-        </p:nvGraphicFramePr>
-        <p:xfrm>
-          <a:off x="8851320" y="1983991"/>
-          <a:ext cx="2828133" cy="410982"/>
-        </p:xfrm>
-        <a:graphic>
-          <a:graphicData uri="http://schemas.openxmlformats.org/drawingml/2006/table">
-            <a:tbl>
-              <a:tblPr firstRow="1" bandRow="1">
-                <a:tableStyleId>{5C22544A-7EE6-4342-B048-85BDC9FD1C3A}</a:tableStyleId>
-              </a:tblPr>
-              <a:tblGrid>
-                <a:gridCol w="1269016">
-                  <a:extLst>
-                    <a:ext uri="{9D8B030D-6E8A-4147-A177-3AD203B41FA5}">
-                      <a16:colId xmlns:a16="http://schemas.microsoft.com/office/drawing/2014/main" val="3852776436"/>
-                    </a:ext>
-                  </a:extLst>
-                </a:gridCol>
-                <a:gridCol w="1559117">
-                  <a:extLst>
-                    <a:ext uri="{9D8B030D-6E8A-4147-A177-3AD203B41FA5}">
-                      <a16:colId xmlns:a16="http://schemas.microsoft.com/office/drawing/2014/main" val="1792951911"/>
-                    </a:ext>
-                  </a:extLst>
-                </a:gridCol>
-              </a:tblGrid>
-              <a:tr h="410982">
-                <a:tc>
-                  <a:txBody>
-                    <a:bodyPr/>
-                    <a:lstStyle/>
-                    <a:p>
-                      <a:pPr algn="ctr"/>
-                      <a:r>
-                        <a:rPr lang="ru-RU" dirty="0">
-                          <a:solidFill>
-                            <a:schemeClr val="tx1"/>
-                          </a:solidFill>
-                        </a:rPr>
-                        <a:t>Энтропия</a:t>
-                      </a:r>
-                    </a:p>
-                  </a:txBody>
-                  <a:tcPr anchor="ctr">
-                    <a:lnL w="12700" cap="flat" cmpd="sng" algn="ctr">
-                      <a:solidFill>
-                        <a:schemeClr val="tx1"/>
-                      </a:solidFill>
-                      <a:prstDash val="solid"/>
-                      <a:round/>
-                      <a:headEnd type="none" w="med" len="med"/>
-                      <a:tailEnd type="none" w="med" len="med"/>
-                    </a:lnL>
-                    <a:lnR w="12700" cap="flat" cmpd="sng" algn="ctr">
-                      <a:solidFill>
-                        <a:schemeClr val="tx1"/>
-                      </a:solidFill>
-                      <a:prstDash val="solid"/>
-                      <a:round/>
-                      <a:headEnd type="none" w="med" len="med"/>
-                      <a:tailEnd type="none" w="med" len="med"/>
-                    </a:lnR>
-                    <a:lnT w="12700" cap="flat" cmpd="sng" algn="ctr">
-                      <a:solidFill>
-                        <a:schemeClr val="tx1"/>
-                      </a:solidFill>
-                      <a:prstDash val="solid"/>
-                      <a:round/>
-                      <a:headEnd type="none" w="med" len="med"/>
-                      <a:tailEnd type="none" w="med" len="med"/>
-                    </a:lnT>
-                    <a:lnB w="12700" cap="flat" cmpd="sng" algn="ctr">
-                      <a:solidFill>
-                        <a:schemeClr val="tx1"/>
-                      </a:solidFill>
-                      <a:prstDash val="solid"/>
-                      <a:round/>
-                      <a:headEnd type="none" w="med" len="med"/>
-                      <a:tailEnd type="none" w="med" len="med"/>
-                    </a:lnB>
-                    <a:lnTlToBr w="12700" cmpd="sng">
-                      <a:noFill/>
-                      <a:prstDash val="solid"/>
-                    </a:lnTlToBr>
-                    <a:lnBlToTr w="12700" cmpd="sng">
-                      <a:noFill/>
-                      <a:prstDash val="solid"/>
-                    </a:lnBlToTr>
-                    <a:solidFill>
-                      <a:schemeClr val="bg1"/>
-                    </a:solidFill>
-                  </a:tcPr>
-                </a:tc>
-                <a:tc>
-                  <a:txBody>
-                    <a:bodyPr/>
-                    <a:lstStyle/>
-                    <a:p>
-                      <a:pPr marL="0" marR="0" lvl="0" indent="0" algn="ctr" defTabSz="914400" rtl="0" eaLnBrk="1" fontAlgn="auto" latinLnBrk="0" hangingPunct="1">
-                        <a:lnSpc>
-                          <a:spcPct val="100000"/>
-                        </a:lnSpc>
-                        <a:spcBef>
-                          <a:spcPts val="0"/>
-                        </a:spcBef>
-                        <a:spcAft>
-                          <a:spcPts val="0"/>
-                        </a:spcAft>
-                        <a:buClrTx/>
-                        <a:buSzTx/>
-                        <a:buFontTx/>
-                        <a:buNone/>
-                        <a:tabLst/>
-                        <a:defRPr/>
-                      </a:pPr>
-                      <a:r>
-                        <a:rPr lang="ru-RU" dirty="0">
-                          <a:solidFill>
-                            <a:schemeClr val="tx1"/>
-                          </a:solidFill>
-                        </a:rPr>
-                        <a:t>7.97</a:t>
-                      </a:r>
-                    </a:p>
-                  </a:txBody>
-                  <a:tcPr anchor="ctr">
-                    <a:lnL w="12700" cap="flat" cmpd="sng" algn="ctr">
-                      <a:solidFill>
-                        <a:schemeClr val="tx1"/>
-                      </a:solidFill>
-                      <a:prstDash val="solid"/>
-                      <a:round/>
-                      <a:headEnd type="none" w="med" len="med"/>
-                      <a:tailEnd type="none" w="med" len="med"/>
-                    </a:lnL>
-                    <a:lnR w="12700" cap="flat" cmpd="sng" algn="ctr">
-                      <a:solidFill>
-                        <a:schemeClr val="tx1"/>
-                      </a:solidFill>
-                      <a:prstDash val="solid"/>
-                      <a:round/>
-                      <a:headEnd type="none" w="med" len="med"/>
-                      <a:tailEnd type="none" w="med" len="med"/>
-                    </a:lnR>
-                    <a:lnT w="12700" cap="flat" cmpd="sng" algn="ctr">
-                      <a:solidFill>
-                        <a:schemeClr val="tx1"/>
-                      </a:solidFill>
-                      <a:prstDash val="solid"/>
-                      <a:round/>
-                      <a:headEnd type="none" w="med" len="med"/>
-                      <a:tailEnd type="none" w="med" len="med"/>
-                    </a:lnT>
-                    <a:lnB w="12700" cap="flat" cmpd="sng" algn="ctr">
-                      <a:solidFill>
-                        <a:schemeClr val="tx1"/>
-                      </a:solidFill>
-                      <a:prstDash val="solid"/>
-                      <a:round/>
-                      <a:headEnd type="none" w="med" len="med"/>
-                      <a:tailEnd type="none" w="med" len="med"/>
-                    </a:lnB>
-                    <a:lnTlToBr w="12700" cmpd="sng">
-                      <a:noFill/>
-                      <a:prstDash val="solid"/>
-                    </a:lnTlToBr>
-                    <a:lnBlToTr w="12700" cmpd="sng">
-                      <a:noFill/>
-                      <a:prstDash val="solid"/>
-                    </a:lnBlToTr>
-                    <a:solidFill>
-                      <a:schemeClr val="bg1"/>
-                    </a:solidFill>
-                  </a:tcPr>
-                </a:tc>
-                <a:extLst>
-                  <a:ext uri="{0D108BD9-81ED-4DB2-BD59-A6C34878D82A}">
-                    <a16:rowId xmlns:a16="http://schemas.microsoft.com/office/drawing/2014/main" val="1488891872"/>
-                  </a:ext>
-                </a:extLst>
-              </a:tr>
-            </a:tbl>
-          </a:graphicData>
-        </a:graphic>
-      </p:graphicFrame>
-      <p:pic>
-        <p:nvPicPr>
-          <p:cNvPr id="6" name="Рисунок 5" descr="Изображение выглядит как символ, Шрифт, логотип, текст&#10;&#10;Содержимое, созданное искусственным интеллектом, может быть неверным.">
-            <a:extLst>
-              <a:ext uri="{FF2B5EF4-FFF2-40B4-BE49-F238E27FC236}">
-                <a16:creationId xmlns:a16="http://schemas.microsoft.com/office/drawing/2014/main" id="{536F0575-4D35-5C05-CA72-4FA21A984455}"/>
-              </a:ext>
-            </a:extLst>
-          </p:cNvPr>
-          <p:cNvPicPr>
-            <a:picLocks noChangeAspect="1"/>
-          </p:cNvPicPr>
-          <p:nvPr/>
-        </p:nvPicPr>
-        <p:blipFill>
-          <a:blip r:embed="rId2">
-            <a:extLst>
-              <a:ext uri="{28A0092B-C50C-407E-A947-70E740481C1C}">
-                <a14:useLocalDpi xmlns:a14="http://schemas.microsoft.com/office/drawing/2010/main" val="0"/>
-              </a:ext>
-            </a:extLst>
-          </a:blip>
-          <a:stretch>
-            <a:fillRect/>
-          </a:stretch>
-        </p:blipFill>
-        <p:spPr>
-          <a:xfrm>
-            <a:off x="8314784" y="0"/>
-            <a:ext cx="3877216" cy="828791"/>
-          </a:xfrm>
-          <a:prstGeom prst="rect">
-            <a:avLst/>
-          </a:prstGeom>
-        </p:spPr>
-      </p:pic>
-      <p:sp>
-        <p:nvSpPr>
-          <p:cNvPr id="7" name="Номер слайда 6">
-            <a:extLst>
-              <a:ext uri="{FF2B5EF4-FFF2-40B4-BE49-F238E27FC236}">
-                <a16:creationId xmlns:a16="http://schemas.microsoft.com/office/drawing/2014/main" id="{25FE0626-13F9-1A33-9214-3204925D569F}"/>
-              </a:ext>
-            </a:extLst>
-          </p:cNvPr>
-          <p:cNvSpPr>
-            <a:spLocks noGrp="1"/>
-          </p:cNvSpPr>
-          <p:nvPr>
-            <p:ph type="sldNum" sz="quarter" idx="12"/>
-          </p:nvPr>
-        </p:nvSpPr>
-        <p:spPr/>
-        <p:txBody>
-          <a:bodyPr/>
-          <a:lstStyle/>
-          <a:p>
-            <a:fld id="{8CC8C628-6975-4CC2-A0F1-47F458287FF0}" type="slidenum">
-              <a:rPr lang="ru-RU" smtClean="0"/>
-              <a:t>10</a:t>
-            </a:fld>
-            <a:endParaRPr lang="ru-RU"/>
-          </a:p>
-        </p:txBody>
-      </p:sp>
-      <p:graphicFrame>
-        <p:nvGraphicFramePr>
-          <p:cNvPr id="5" name="Таблица 4">
-            <a:extLst>
-              <a:ext uri="{FF2B5EF4-FFF2-40B4-BE49-F238E27FC236}">
-                <a16:creationId xmlns:a16="http://schemas.microsoft.com/office/drawing/2014/main" id="{CFBAE33F-0CEE-DD15-224A-2110B298A21C}"/>
-              </a:ext>
-            </a:extLst>
-          </p:cNvPr>
-          <p:cNvGraphicFramePr>
-            <a:graphicFrameLocks noGrp="1"/>
-          </p:cNvGraphicFramePr>
-          <p:nvPr>
-            <p:extLst>
-              <p:ext uri="{D42A27DB-BD31-4B8C-83A1-F6EECF244321}">
-                <p14:modId xmlns:p14="http://schemas.microsoft.com/office/powerpoint/2010/main" val="2560914952"/>
-              </p:ext>
-            </p:extLst>
-          </p:nvPr>
-        </p:nvGraphicFramePr>
-        <p:xfrm>
-          <a:off x="395973" y="4410821"/>
-          <a:ext cx="2828133" cy="565685"/>
-        </p:xfrm>
-        <a:graphic>
-          <a:graphicData uri="http://schemas.openxmlformats.org/drawingml/2006/table">
-            <a:tbl>
-              <a:tblPr firstRow="1" bandRow="1">
-                <a:tableStyleId>{5C22544A-7EE6-4342-B048-85BDC9FD1C3A}</a:tableStyleId>
-              </a:tblPr>
-              <a:tblGrid>
-                <a:gridCol w="1269016">
-                  <a:extLst>
-                    <a:ext uri="{9D8B030D-6E8A-4147-A177-3AD203B41FA5}">
-                      <a16:colId xmlns:a16="http://schemas.microsoft.com/office/drawing/2014/main" val="3852776436"/>
-                    </a:ext>
-                  </a:extLst>
-                </a:gridCol>
-                <a:gridCol w="1559117">
-                  <a:extLst>
-                    <a:ext uri="{9D8B030D-6E8A-4147-A177-3AD203B41FA5}">
-                      <a16:colId xmlns:a16="http://schemas.microsoft.com/office/drawing/2014/main" val="1792951911"/>
-                    </a:ext>
-                  </a:extLst>
-                </a:gridCol>
-              </a:tblGrid>
-              <a:tr h="565685">
-                <a:tc>
-                  <a:txBody>
-                    <a:bodyPr/>
-                    <a:lstStyle/>
-                    <a:p>
-                      <a:pPr algn="ctr"/>
-                      <a:r>
-                        <a:rPr lang="ru-RU" dirty="0">
-                          <a:solidFill>
-                            <a:schemeClr val="tx1"/>
-                          </a:solidFill>
-                        </a:rPr>
-                        <a:t>Размер</a:t>
-                      </a:r>
-                    </a:p>
-                  </a:txBody>
-                  <a:tcPr anchor="ctr">
-                    <a:lnL w="12700" cap="flat" cmpd="sng" algn="ctr">
-                      <a:solidFill>
-                        <a:schemeClr val="tx1"/>
-                      </a:solidFill>
-                      <a:prstDash val="solid"/>
-                      <a:round/>
-                      <a:headEnd type="none" w="med" len="med"/>
-                      <a:tailEnd type="none" w="med" len="med"/>
-                    </a:lnL>
-                    <a:lnR w="12700" cap="flat" cmpd="sng" algn="ctr">
-                      <a:solidFill>
-                        <a:schemeClr val="tx1"/>
-                      </a:solidFill>
-                      <a:prstDash val="solid"/>
-                      <a:round/>
-                      <a:headEnd type="none" w="med" len="med"/>
-                      <a:tailEnd type="none" w="med" len="med"/>
-                    </a:lnR>
-                    <a:lnT w="12700" cap="flat" cmpd="sng" algn="ctr">
-                      <a:solidFill>
-                        <a:schemeClr val="tx1"/>
-                      </a:solidFill>
-                      <a:prstDash val="solid"/>
-                      <a:round/>
-                      <a:headEnd type="none" w="med" len="med"/>
-                      <a:tailEnd type="none" w="med" len="med"/>
-                    </a:lnT>
-                    <a:lnB w="12700" cap="flat" cmpd="sng" algn="ctr">
-                      <a:solidFill>
-                        <a:schemeClr val="tx1"/>
-                      </a:solidFill>
-                      <a:prstDash val="solid"/>
-                      <a:round/>
-                      <a:headEnd type="none" w="med" len="med"/>
-                      <a:tailEnd type="none" w="med" len="med"/>
-                    </a:lnB>
-                    <a:lnTlToBr w="12700" cmpd="sng">
-                      <a:noFill/>
-                      <a:prstDash val="solid"/>
-                    </a:lnTlToBr>
-                    <a:lnBlToTr w="12700" cmpd="sng">
-                      <a:noFill/>
-                      <a:prstDash val="solid"/>
-                    </a:lnBlToTr>
-                    <a:solidFill>
-                      <a:schemeClr val="bg1"/>
-                    </a:solidFill>
-                  </a:tcPr>
-                </a:tc>
-                <a:tc>
-                  <a:txBody>
-                    <a:bodyPr/>
-                    <a:lstStyle/>
-                    <a:p>
-                      <a:pPr marL="0" marR="0" lvl="0" indent="0" algn="ctr" defTabSz="914400" rtl="0" eaLnBrk="1" fontAlgn="auto" latinLnBrk="0" hangingPunct="1">
-                        <a:lnSpc>
-                          <a:spcPct val="100000"/>
-                        </a:lnSpc>
-                        <a:spcBef>
-                          <a:spcPts val="0"/>
-                        </a:spcBef>
-                        <a:spcAft>
-                          <a:spcPts val="0"/>
-                        </a:spcAft>
-                        <a:buClrTx/>
-                        <a:buSzTx/>
-                        <a:buFontTx/>
-                        <a:buNone/>
-                        <a:tabLst/>
-                        <a:defRPr/>
-                      </a:pPr>
-                      <a:r>
-                        <a:rPr lang="ru-RU" dirty="0">
-                          <a:solidFill>
-                            <a:schemeClr val="tx1"/>
-                          </a:solidFill>
-                        </a:rPr>
-                        <a:t>73 Кб</a:t>
-                      </a:r>
-                    </a:p>
-                  </a:txBody>
-                  <a:tcPr anchor="ctr">
-                    <a:lnL w="12700" cap="flat" cmpd="sng" algn="ctr">
-                      <a:solidFill>
-                        <a:schemeClr val="tx1"/>
-                      </a:solidFill>
-                      <a:prstDash val="solid"/>
-                      <a:round/>
-                      <a:headEnd type="none" w="med" len="med"/>
-                      <a:tailEnd type="none" w="med" len="med"/>
-                    </a:lnL>
-                    <a:lnR w="12700" cap="flat" cmpd="sng" algn="ctr">
-                      <a:solidFill>
-                        <a:schemeClr val="tx1"/>
-                      </a:solidFill>
-                      <a:prstDash val="solid"/>
-                      <a:round/>
-                      <a:headEnd type="none" w="med" len="med"/>
-                      <a:tailEnd type="none" w="med" len="med"/>
-                    </a:lnR>
-                    <a:lnT w="12700" cap="flat" cmpd="sng" algn="ctr">
-                      <a:solidFill>
-                        <a:schemeClr val="tx1"/>
-                      </a:solidFill>
-                      <a:prstDash val="solid"/>
-                      <a:round/>
-                      <a:headEnd type="none" w="med" len="med"/>
-                      <a:tailEnd type="none" w="med" len="med"/>
-                    </a:lnT>
-                    <a:lnB w="12700" cap="flat" cmpd="sng" algn="ctr">
-                      <a:solidFill>
-                        <a:schemeClr val="tx1"/>
-                      </a:solidFill>
-                      <a:prstDash val="solid"/>
-                      <a:round/>
-                      <a:headEnd type="none" w="med" len="med"/>
-                      <a:tailEnd type="none" w="med" len="med"/>
-                    </a:lnB>
-                    <a:lnTlToBr w="12700" cmpd="sng">
-                      <a:noFill/>
-                      <a:prstDash val="solid"/>
-                    </a:lnTlToBr>
-                    <a:lnBlToTr w="12700" cmpd="sng">
-                      <a:noFill/>
-                      <a:prstDash val="solid"/>
-                    </a:lnBlToTr>
-                    <a:solidFill>
-                      <a:schemeClr val="bg1"/>
-                    </a:solidFill>
-                  </a:tcPr>
-                </a:tc>
-                <a:extLst>
-                  <a:ext uri="{0D108BD9-81ED-4DB2-BD59-A6C34878D82A}">
-                    <a16:rowId xmlns:a16="http://schemas.microsoft.com/office/drawing/2014/main" val="1488891872"/>
-                  </a:ext>
-                </a:extLst>
-              </a:tr>
-            </a:tbl>
-          </a:graphicData>
-        </a:graphic>
-      </p:graphicFrame>
-      <p:graphicFrame>
-        <p:nvGraphicFramePr>
-          <p:cNvPr id="8" name="Таблица 7">
-            <a:extLst>
-              <a:ext uri="{FF2B5EF4-FFF2-40B4-BE49-F238E27FC236}">
-                <a16:creationId xmlns:a16="http://schemas.microsoft.com/office/drawing/2014/main" id="{73A89171-14E4-3559-0100-C807D4988F75}"/>
-              </a:ext>
-            </a:extLst>
-          </p:cNvPr>
-          <p:cNvGraphicFramePr>
-            <a:graphicFrameLocks noGrp="1"/>
-          </p:cNvGraphicFramePr>
-          <p:nvPr>
-            <p:extLst>
-              <p:ext uri="{D42A27DB-BD31-4B8C-83A1-F6EECF244321}">
-                <p14:modId xmlns:p14="http://schemas.microsoft.com/office/powerpoint/2010/main" val="2561587389"/>
-              </p:ext>
-            </p:extLst>
-          </p:nvPr>
-        </p:nvGraphicFramePr>
-        <p:xfrm>
-          <a:off x="395973" y="5400195"/>
-          <a:ext cx="2828133" cy="565685"/>
-        </p:xfrm>
-        <a:graphic>
-          <a:graphicData uri="http://schemas.openxmlformats.org/drawingml/2006/table">
-            <a:tbl>
-              <a:tblPr firstRow="1" bandRow="1">
-                <a:tableStyleId>{5C22544A-7EE6-4342-B048-85BDC9FD1C3A}</a:tableStyleId>
-              </a:tblPr>
-              <a:tblGrid>
-                <a:gridCol w="1269016">
-                  <a:extLst>
-                    <a:ext uri="{9D8B030D-6E8A-4147-A177-3AD203B41FA5}">
-                      <a16:colId xmlns:a16="http://schemas.microsoft.com/office/drawing/2014/main" val="3852776436"/>
-                    </a:ext>
-                  </a:extLst>
-                </a:gridCol>
-                <a:gridCol w="1559117">
-                  <a:extLst>
-                    <a:ext uri="{9D8B030D-6E8A-4147-A177-3AD203B41FA5}">
-                      <a16:colId xmlns:a16="http://schemas.microsoft.com/office/drawing/2014/main" val="1792951911"/>
-                    </a:ext>
-                  </a:extLst>
-                </a:gridCol>
-              </a:tblGrid>
-              <a:tr h="565685">
-                <a:tc>
-                  <a:txBody>
-                    <a:bodyPr/>
-                    <a:lstStyle/>
-                    <a:p>
-                      <a:pPr algn="ctr"/>
-                      <a:r>
-                        <a:rPr lang="ru-RU" dirty="0">
-                          <a:solidFill>
-                            <a:schemeClr val="tx1"/>
-                          </a:solidFill>
-                        </a:rPr>
-                        <a:t>Энтропия</a:t>
-                      </a:r>
-                    </a:p>
-                  </a:txBody>
-                  <a:tcPr anchor="ctr">
-                    <a:lnL w="12700" cap="flat" cmpd="sng" algn="ctr">
-                      <a:solidFill>
-                        <a:schemeClr val="tx1"/>
-                      </a:solidFill>
-                      <a:prstDash val="solid"/>
-                      <a:round/>
-                      <a:headEnd type="none" w="med" len="med"/>
-                      <a:tailEnd type="none" w="med" len="med"/>
-                    </a:lnL>
-                    <a:lnR w="12700" cap="flat" cmpd="sng" algn="ctr">
-                      <a:solidFill>
-                        <a:schemeClr val="tx1"/>
-                      </a:solidFill>
-                      <a:prstDash val="solid"/>
-                      <a:round/>
-                      <a:headEnd type="none" w="med" len="med"/>
-                      <a:tailEnd type="none" w="med" len="med"/>
-                    </a:lnR>
-                    <a:lnT w="12700" cap="flat" cmpd="sng" algn="ctr">
-                      <a:solidFill>
-                        <a:schemeClr val="tx1"/>
-                      </a:solidFill>
-                      <a:prstDash val="solid"/>
-                      <a:round/>
-                      <a:headEnd type="none" w="med" len="med"/>
-                      <a:tailEnd type="none" w="med" len="med"/>
-                    </a:lnT>
-                    <a:lnB w="12700" cap="flat" cmpd="sng" algn="ctr">
-                      <a:solidFill>
-                        <a:schemeClr val="tx1"/>
-                      </a:solidFill>
-                      <a:prstDash val="solid"/>
-                      <a:round/>
-                      <a:headEnd type="none" w="med" len="med"/>
-                      <a:tailEnd type="none" w="med" len="med"/>
-                    </a:lnB>
-                    <a:lnTlToBr w="12700" cmpd="sng">
-                      <a:noFill/>
-                      <a:prstDash val="solid"/>
-                    </a:lnTlToBr>
-                    <a:lnBlToTr w="12700" cmpd="sng">
-                      <a:noFill/>
-                      <a:prstDash val="solid"/>
-                    </a:lnBlToTr>
-                    <a:solidFill>
-                      <a:schemeClr val="bg1"/>
-                    </a:solidFill>
-                  </a:tcPr>
-                </a:tc>
-                <a:tc>
-                  <a:txBody>
-                    <a:bodyPr/>
-                    <a:lstStyle/>
-                    <a:p>
-                      <a:pPr marL="0" marR="0" lvl="0" indent="0" algn="ctr" defTabSz="914400" rtl="0" eaLnBrk="1" fontAlgn="auto" latinLnBrk="0" hangingPunct="1">
-                        <a:lnSpc>
-                          <a:spcPct val="100000"/>
-                        </a:lnSpc>
-                        <a:spcBef>
-                          <a:spcPts val="0"/>
-                        </a:spcBef>
-                        <a:spcAft>
-                          <a:spcPts val="0"/>
-                        </a:spcAft>
-                        <a:buClrTx/>
-                        <a:buSzTx/>
-                        <a:buFontTx/>
-                        <a:buNone/>
-                        <a:tabLst/>
-                        <a:defRPr/>
-                      </a:pPr>
-                      <a:r>
-                        <a:rPr lang="ru-RU" dirty="0">
-                          <a:solidFill>
-                            <a:schemeClr val="tx1"/>
-                          </a:solidFill>
-                        </a:rPr>
-                        <a:t>7.97</a:t>
-                      </a:r>
-                    </a:p>
-                  </a:txBody>
-                  <a:tcPr anchor="ctr">
-                    <a:lnL w="12700" cap="flat" cmpd="sng" algn="ctr">
-                      <a:solidFill>
-                        <a:schemeClr val="tx1"/>
-                      </a:solidFill>
-                      <a:prstDash val="solid"/>
-                      <a:round/>
-                      <a:headEnd type="none" w="med" len="med"/>
-                      <a:tailEnd type="none" w="med" len="med"/>
-                    </a:lnL>
-                    <a:lnR w="12700" cap="flat" cmpd="sng" algn="ctr">
-                      <a:solidFill>
-                        <a:schemeClr val="tx1"/>
-                      </a:solidFill>
-                      <a:prstDash val="solid"/>
-                      <a:round/>
-                      <a:headEnd type="none" w="med" len="med"/>
-                      <a:tailEnd type="none" w="med" len="med"/>
-                    </a:lnR>
-                    <a:lnT w="12700" cap="flat" cmpd="sng" algn="ctr">
-                      <a:solidFill>
-                        <a:schemeClr val="tx1"/>
-                      </a:solidFill>
-                      <a:prstDash val="solid"/>
-                      <a:round/>
-                      <a:headEnd type="none" w="med" len="med"/>
-                      <a:tailEnd type="none" w="med" len="med"/>
-                    </a:lnT>
-                    <a:lnB w="12700" cap="flat" cmpd="sng" algn="ctr">
-                      <a:solidFill>
-                        <a:schemeClr val="tx1"/>
-                      </a:solidFill>
-                      <a:prstDash val="solid"/>
-                      <a:round/>
-                      <a:headEnd type="none" w="med" len="med"/>
-                      <a:tailEnd type="none" w="med" len="med"/>
-                    </a:lnB>
-                    <a:lnTlToBr w="12700" cmpd="sng">
-                      <a:noFill/>
-                      <a:prstDash val="solid"/>
-                    </a:lnTlToBr>
-                    <a:lnBlToTr w="12700" cmpd="sng">
-                      <a:noFill/>
-                      <a:prstDash val="solid"/>
-                    </a:lnBlToTr>
-                    <a:solidFill>
-                      <a:schemeClr val="bg1"/>
-                    </a:solidFill>
-                  </a:tcPr>
-                </a:tc>
-                <a:extLst>
-                  <a:ext uri="{0D108BD9-81ED-4DB2-BD59-A6C34878D82A}">
-                    <a16:rowId xmlns:a16="http://schemas.microsoft.com/office/drawing/2014/main" val="1488891872"/>
-                  </a:ext>
-                </a:extLst>
-              </a:tr>
-            </a:tbl>
-          </a:graphicData>
-        </a:graphic>
-      </p:graphicFrame>
-      <p:sp>
-        <p:nvSpPr>
-          <p:cNvPr id="9" name="TextBox 8">
-            <a:extLst>
-              <a:ext uri="{FF2B5EF4-FFF2-40B4-BE49-F238E27FC236}">
-                <a16:creationId xmlns:a16="http://schemas.microsoft.com/office/drawing/2014/main" id="{C48307A4-8A0E-0D76-9770-AA477F3B1E62}"/>
-              </a:ext>
-            </a:extLst>
-          </p:cNvPr>
-          <p:cNvSpPr txBox="1"/>
-          <p:nvPr/>
-        </p:nvSpPr>
-        <p:spPr>
-          <a:xfrm>
-            <a:off x="232597" y="204026"/>
-            <a:ext cx="8606727" cy="954107"/>
-          </a:xfrm>
-          <a:prstGeom prst="rect">
-            <a:avLst/>
-          </a:prstGeom>
-          <a:noFill/>
-        </p:spPr>
-        <p:txBody>
-          <a:bodyPr wrap="square">
-            <a:spAutoFit/>
-          </a:bodyPr>
-          <a:lstStyle/>
-          <a:p>
-            <a:r>
-              <a:rPr lang="en-US" sz="2800" dirty="0"/>
-              <a:t>Гистограмма </a:t>
-            </a:r>
-            <a:r>
-              <a:rPr lang="ru-RU" sz="2800" dirty="0"/>
-              <a:t>распределения значений</a:t>
-            </a:r>
-            <a:r>
-              <a:rPr lang="en-US" sz="2800" dirty="0"/>
-              <a:t> </a:t>
-            </a:r>
-            <a:r>
-              <a:rPr lang="ru-RU" sz="2800" dirty="0"/>
-              <a:t>изображения обложки книги в формате</a:t>
-            </a:r>
-            <a:r>
-              <a:rPr lang="en-US" sz="2800" dirty="0"/>
-              <a:t> jpg</a:t>
-            </a:r>
-            <a:r>
-              <a:rPr lang="ru-RU" sz="2800" dirty="0"/>
-              <a:t>  и сжатая </a:t>
-            </a:r>
-            <a:r>
-              <a:rPr lang="en-US" sz="2800" dirty="0"/>
-              <a:t>jpg</a:t>
-            </a:r>
-            <a:endParaRPr lang="ru-RU" sz="2800" dirty="0"/>
-          </a:p>
-        </p:txBody>
-      </p:sp>
-      <p:pic>
-        <p:nvPicPr>
-          <p:cNvPr id="4" name="Рисунок 3">
-            <a:extLst>
-              <a:ext uri="{FF2B5EF4-FFF2-40B4-BE49-F238E27FC236}">
-                <a16:creationId xmlns:a16="http://schemas.microsoft.com/office/drawing/2014/main" id="{A2A3BF04-D17A-2C3E-3CA1-32985ED418C6}"/>
-              </a:ext>
-            </a:extLst>
-          </p:cNvPr>
-          <p:cNvPicPr>
-            <a:picLocks noChangeAspect="1"/>
-          </p:cNvPicPr>
-          <p:nvPr/>
-        </p:nvPicPr>
-        <p:blipFill>
-          <a:blip r:embed="rId3">
-            <a:extLst>
-              <a:ext uri="{28A0092B-C50C-407E-A947-70E740481C1C}">
-                <a14:useLocalDpi xmlns:a14="http://schemas.microsoft.com/office/drawing/2010/main" val="0"/>
-              </a:ext>
-            </a:extLst>
-          </a:blip>
-          <a:stretch>
-            <a:fillRect/>
-          </a:stretch>
-        </p:blipFill>
-        <p:spPr>
-          <a:xfrm>
-            <a:off x="0" y="1677533"/>
-            <a:ext cx="8622485" cy="1907280"/>
-          </a:xfrm>
-          <a:prstGeom prst="rect">
-            <a:avLst/>
-          </a:prstGeom>
-        </p:spPr>
-      </p:pic>
-      <p:pic>
-        <p:nvPicPr>
-          <p:cNvPr id="12" name="Рисунок 11" descr="Изображение выглядит как снимок экрана, Графическое программное обеспечение, Мультимедийное программное обеспечение, Редактирование&#10;&#10;Содержимое, созданное искусственным интеллектом, может быть неверным.">
-            <a:extLst>
-              <a:ext uri="{FF2B5EF4-FFF2-40B4-BE49-F238E27FC236}">
-                <a16:creationId xmlns:a16="http://schemas.microsoft.com/office/drawing/2014/main" id="{1CAAA2A3-D311-8E37-1FF0-54FAB971D9B3}"/>
-              </a:ext>
-            </a:extLst>
-          </p:cNvPr>
-          <p:cNvPicPr>
-            <a:picLocks noChangeAspect="1"/>
-          </p:cNvPicPr>
-          <p:nvPr/>
-        </p:nvPicPr>
-        <p:blipFill>
-          <a:blip r:embed="rId4"/>
-          <a:stretch>
-            <a:fillRect/>
-          </a:stretch>
-        </p:blipFill>
-        <p:spPr>
-          <a:xfrm>
-            <a:off x="3581400" y="4347122"/>
-            <a:ext cx="8610600" cy="1999126"/>
-          </a:xfrm>
-          <a:prstGeom prst="rect">
-            <a:avLst/>
-          </a:prstGeom>
-        </p:spPr>
-      </p:pic>
-    </p:spTree>
-    <p:extLst>
-      <p:ext uri="{BB962C8B-B14F-4D97-AF65-F5344CB8AC3E}">
-        <p14:creationId xmlns:p14="http://schemas.microsoft.com/office/powerpoint/2010/main" val="1597462497"/>
-      </p:ext>
-    </p:extLst>
-  </p:cSld>
-  <p:clrMapOvr>
-    <a:masterClrMapping/>
-  </p:clrMapOvr>
-</p:sld>
-</file>
-
-<file path=ppt/slides/slide11.xml><?xml version="1.0" encoding="utf-8"?>
 <p:sld xmlns:a="http://schemas.openxmlformats.org/drawingml/2006/main" xmlns:r="http://schemas.openxmlformats.org/officeDocument/2006/relationships" xmlns:p="http://schemas.openxmlformats.org/presentationml/2006/main">
   <p:cSld>
     <p:spTree>
@@ -5214,7 +4166,7 @@
           <a:p>
             <a:fld id="{8CC8C628-6975-4CC2-A0F1-47F458287FF0}" type="slidenum">
               <a:rPr lang="ru-RU" smtClean="0"/>
-              <a:t>11</a:t>
+              <a:t>10</a:t>
             </a:fld>
             <a:endParaRPr lang="ru-RU"/>
           </a:p>
@@ -5769,7 +4721,7 @@
 </p:sld>
 </file>
 
-<file path=ppt/slides/slide12.xml><?xml version="1.0" encoding="utf-8"?>
+<file path=ppt/slides/slide11.xml><?xml version="1.0" encoding="utf-8"?>
 <p:sld xmlns:a="http://schemas.openxmlformats.org/drawingml/2006/main" xmlns:r="http://schemas.openxmlformats.org/officeDocument/2006/relationships" xmlns:p="http://schemas.openxmlformats.org/presentationml/2006/main">
   <p:cSld>
     <p:spTree>
@@ -6261,7 +5213,7 @@
           <a:p>
             <a:fld id="{8CC8C628-6975-4CC2-A0F1-47F458287FF0}" type="slidenum">
               <a:rPr lang="ru-RU" smtClean="0"/>
-              <a:t>12</a:t>
+              <a:t>11</a:t>
             </a:fld>
             <a:endParaRPr lang="ru-RU"/>
           </a:p>
@@ -6811,7 +5763,7 @@
 </p:sld>
 </file>
 
-<file path=ppt/slides/slide13.xml><?xml version="1.0" encoding="utf-8"?>
+<file path=ppt/slides/slide12.xml><?xml version="1.0" encoding="utf-8"?>
 <p:sld xmlns:a="http://schemas.openxmlformats.org/drawingml/2006/main" xmlns:r="http://schemas.openxmlformats.org/officeDocument/2006/relationships" xmlns:p="http://schemas.openxmlformats.org/presentationml/2006/main">
   <p:cSld>
     <p:spTree>
@@ -7303,7 +6255,7 @@
           <a:p>
             <a:fld id="{8CC8C628-6975-4CC2-A0F1-47F458287FF0}" type="slidenum">
               <a:rPr lang="ru-RU" smtClean="0"/>
-              <a:t>13</a:t>
+              <a:t>12</a:t>
             </a:fld>
             <a:endParaRPr lang="ru-RU"/>
           </a:p>
@@ -7874,7 +6826,7 @@
 </p:sld>
 </file>
 
-<file path=ppt/slides/slide14.xml><?xml version="1.0" encoding="utf-8"?>
+<file path=ppt/slides/slide13.xml><?xml version="1.0" encoding="utf-8"?>
 <p:sld xmlns:a="http://schemas.openxmlformats.org/drawingml/2006/main" xmlns:r="http://schemas.openxmlformats.org/officeDocument/2006/relationships" xmlns:p="http://schemas.openxmlformats.org/presentationml/2006/main">
   <p:cSld>
     <p:spTree>
@@ -8379,7 +7331,7 @@
           <a:p>
             <a:fld id="{8CC8C628-6975-4CC2-A0F1-47F458287FF0}" type="slidenum">
               <a:rPr lang="ru-RU" smtClean="0"/>
-              <a:t>14</a:t>
+              <a:t>13</a:t>
             </a:fld>
             <a:endParaRPr lang="ru-RU"/>
           </a:p>
@@ -8950,7 +7902,7 @@
 </p:sld>
 </file>
 
-<file path=ppt/slides/slide15.xml><?xml version="1.0" encoding="utf-8"?>
+<file path=ppt/slides/slide14.xml><?xml version="1.0" encoding="utf-8"?>
 <p:sld xmlns:a="http://schemas.openxmlformats.org/drawingml/2006/main" xmlns:r="http://schemas.openxmlformats.org/officeDocument/2006/relationships" xmlns:p="http://schemas.openxmlformats.org/presentationml/2006/main">
   <p:cSld>
     <p:spTree>
@@ -9455,7 +8407,7 @@
           <a:p>
             <a:fld id="{8CC8C628-6975-4CC2-A0F1-47F458287FF0}" type="slidenum">
               <a:rPr lang="ru-RU" smtClean="0"/>
-              <a:t>15</a:t>
+              <a:t>14</a:t>
             </a:fld>
             <a:endParaRPr lang="ru-RU"/>
           </a:p>
@@ -10014,7 +8966,7 @@
 </p:sld>
 </file>
 
-<file path=ppt/slides/slide16.xml><?xml version="1.0" encoding="utf-8"?>
+<file path=ppt/slides/slide15.xml><?xml version="1.0" encoding="utf-8"?>
 <p:sld xmlns:a="http://schemas.openxmlformats.org/drawingml/2006/main" xmlns:r="http://schemas.openxmlformats.org/officeDocument/2006/relationships" xmlns:p="http://schemas.openxmlformats.org/presentationml/2006/main">
   <p:cSld>
     <p:spTree>
@@ -10519,7 +9471,7 @@
           <a:p>
             <a:fld id="{8CC8C628-6975-4CC2-A0F1-47F458287FF0}" type="slidenum">
               <a:rPr lang="ru-RU" smtClean="0"/>
-              <a:t>16</a:t>
+              <a:t>15</a:t>
             </a:fld>
             <a:endParaRPr lang="ru-RU"/>
           </a:p>
@@ -11074,7 +10026,7 @@
 </p:sld>
 </file>
 
-<file path=ppt/slides/slide17.xml><?xml version="1.0" encoding="utf-8"?>
+<file path=ppt/slides/slide16.xml><?xml version="1.0" encoding="utf-8"?>
 <p:sld xmlns:a="http://schemas.openxmlformats.org/drawingml/2006/main" xmlns:r="http://schemas.openxmlformats.org/officeDocument/2006/relationships" xmlns:p="http://schemas.openxmlformats.org/presentationml/2006/main">
   <p:cSld>
     <p:spTree>
@@ -11579,7 +10531,7 @@
           <a:p>
             <a:fld id="{8CC8C628-6975-4CC2-A0F1-47F458287FF0}" type="slidenum">
               <a:rPr lang="ru-RU" smtClean="0"/>
-              <a:t>17</a:t>
+              <a:t>16</a:t>
             </a:fld>
             <a:endParaRPr lang="ru-RU"/>
           </a:p>
@@ -12136,7 +11088,7 @@
 </p:sld>
 </file>
 
-<file path=ppt/slides/slide18.xml><?xml version="1.0" encoding="utf-8"?>
+<file path=ppt/slides/slide17.xml><?xml version="1.0" encoding="utf-8"?>
 <p:sld xmlns:a="http://schemas.openxmlformats.org/drawingml/2006/main" xmlns:r="http://schemas.openxmlformats.org/officeDocument/2006/relationships" xmlns:p="http://schemas.openxmlformats.org/presentationml/2006/main">
   <p:cSld>
     <p:bg>
@@ -21470,7 +20422,7 @@
           <a:p>
             <a:fld id="{8CC8C628-6975-4CC2-A0F1-47F458287FF0}" type="slidenum">
               <a:rPr lang="ru-RU" smtClean="0"/>
-              <a:t>18</a:t>
+              <a:t>17</a:t>
             </a:fld>
             <a:endParaRPr lang="ru-RU" dirty="0"/>
           </a:p>
@@ -21489,7 +20441,7 @@
 </p:sld>
 </file>
 
-<file path=ppt/slides/slide19.xml><?xml version="1.0" encoding="utf-8"?>
+<file path=ppt/slides/slide18.xml><?xml version="1.0" encoding="utf-8"?>
 <p:sld xmlns:a="http://schemas.openxmlformats.org/drawingml/2006/main" xmlns:r="http://schemas.openxmlformats.org/officeDocument/2006/relationships" xmlns:p="http://schemas.openxmlformats.org/presentationml/2006/main">
   <p:cSld>
     <p:spTree>
@@ -21758,7 +20710,7 @@
           <a:p>
             <a:fld id="{8CC8C628-6975-4CC2-A0F1-47F458287FF0}" type="slidenum">
               <a:rPr lang="ru-RU" smtClean="0"/>
-              <a:t>19</a:t>
+              <a:t>18</a:t>
             </a:fld>
             <a:endParaRPr lang="ru-RU"/>
           </a:p>
@@ -21768,6 +20720,146 @@
     <p:extLst>
       <p:ext uri="{BB962C8B-B14F-4D97-AF65-F5344CB8AC3E}">
         <p14:creationId xmlns:p14="http://schemas.microsoft.com/office/powerpoint/2010/main" val="138910250"/>
+      </p:ext>
+    </p:extLst>
+  </p:cSld>
+  <p:clrMapOvr>
+    <a:masterClrMapping/>
+  </p:clrMapOvr>
+</p:sld>
+</file>
+
+<file path=ppt/slides/slide19.xml><?xml version="1.0" encoding="utf-8"?>
+<p:sld xmlns:a="http://schemas.openxmlformats.org/drawingml/2006/main" xmlns:r="http://schemas.openxmlformats.org/officeDocument/2006/relationships" xmlns:p="http://schemas.openxmlformats.org/presentationml/2006/main">
+  <p:cSld>
+    <p:spTree>
+      <p:nvGrpSpPr>
+        <p:cNvPr id="1" name="">
+          <a:extLst>
+            <a:ext uri="{FF2B5EF4-FFF2-40B4-BE49-F238E27FC236}">
+              <a16:creationId xmlns:a16="http://schemas.microsoft.com/office/drawing/2014/main" id="{C4C8BF6D-6408-DAA1-77B5-AB0FF7354022}"/>
+            </a:ext>
+          </a:extLst>
+        </p:cNvPr>
+        <p:cNvGrpSpPr/>
+        <p:nvPr/>
+      </p:nvGrpSpPr>
+      <p:grpSpPr>
+        <a:xfrm>
+          <a:off x="0" y="0"/>
+          <a:ext cx="0" cy="0"/>
+          <a:chOff x="0" y="0"/>
+          <a:chExt cx="0" cy="0"/>
+        </a:xfrm>
+      </p:grpSpPr>
+      <p:sp>
+        <p:nvSpPr>
+          <p:cNvPr id="3" name="Объект 2">
+            <a:extLst>
+              <a:ext uri="{FF2B5EF4-FFF2-40B4-BE49-F238E27FC236}">
+                <a16:creationId xmlns:a16="http://schemas.microsoft.com/office/drawing/2014/main" id="{D0BDBB1D-238A-45D9-630F-4E4B6F236464}"/>
+              </a:ext>
+            </a:extLst>
+          </p:cNvPr>
+          <p:cNvSpPr>
+            <a:spLocks noGrp="1"/>
+          </p:cNvSpPr>
+          <p:nvPr>
+            <p:ph idx="1"/>
+          </p:nvPr>
+        </p:nvSpPr>
+        <p:spPr>
+          <a:xfrm>
+            <a:off x="4324350" y="3187267"/>
+            <a:ext cx="3543300" cy="483466"/>
+          </a:xfrm>
+        </p:spPr>
+        <p:txBody>
+          <a:bodyPr/>
+          <a:lstStyle/>
+          <a:p>
+            <a:pPr marL="0" indent="0" algn="just">
+              <a:buNone/>
+            </a:pPr>
+            <a:r>
+              <a:rPr lang="ru-RU" dirty="0">
+                <a:latin typeface="Times New Roman" panose="02020603050405020304" pitchFamily="18" charset="0"/>
+                <a:cs typeface="Times New Roman" panose="02020603050405020304" pitchFamily="18" charset="0"/>
+              </a:rPr>
+              <a:t>Спасибо за внимание!</a:t>
+            </a:r>
+          </a:p>
+        </p:txBody>
+      </p:sp>
+      <p:sp>
+        <p:nvSpPr>
+          <p:cNvPr id="2" name="Номер слайда 1">
+            <a:extLst>
+              <a:ext uri="{FF2B5EF4-FFF2-40B4-BE49-F238E27FC236}">
+                <a16:creationId xmlns:a16="http://schemas.microsoft.com/office/drawing/2014/main" id="{F6EC9229-D156-AF9D-613F-70E205569C4D}"/>
+              </a:ext>
+            </a:extLst>
+          </p:cNvPr>
+          <p:cNvSpPr>
+            <a:spLocks noGrp="1"/>
+          </p:cNvSpPr>
+          <p:nvPr>
+            <p:ph type="sldNum" sz="quarter" idx="12"/>
+          </p:nvPr>
+        </p:nvSpPr>
+        <p:spPr/>
+        <p:txBody>
+          <a:bodyPr/>
+          <a:lstStyle/>
+          <a:p>
+            <a:fld id="{A93D2B9D-3E5A-4208-B841-6DCB29E9E020}" type="slidenum">
+              <a:rPr lang="ru-RU" smtClean="0"/>
+              <a:t>19</a:t>
+            </a:fld>
+            <a:endParaRPr lang="ru-RU"/>
+          </a:p>
+        </p:txBody>
+      </p:sp>
+      <p:pic>
+        <p:nvPicPr>
+          <p:cNvPr id="4" name="Рисунок 3" descr="Изображение выглядит как символ, Шрифт, логотип, текст&#10;&#10;Содержимое, созданное искусственным интеллектом, может быть неверным.">
+            <a:extLst>
+              <a:ext uri="{FF2B5EF4-FFF2-40B4-BE49-F238E27FC236}">
+                <a16:creationId xmlns:a16="http://schemas.microsoft.com/office/drawing/2014/main" id="{E6F95CCD-4237-E6E7-3C5B-26C3688C18CC}"/>
+              </a:ext>
+            </a:extLst>
+          </p:cNvPr>
+          <p:cNvPicPr>
+            <a:picLocks noChangeAspect="1"/>
+          </p:cNvPicPr>
+          <p:nvPr/>
+        </p:nvPicPr>
+        <p:blipFill>
+          <a:blip r:embed="rId2">
+            <a:extLst>
+              <a:ext uri="{28A0092B-C50C-407E-A947-70E740481C1C}">
+                <a14:useLocalDpi xmlns:a14="http://schemas.microsoft.com/office/drawing/2010/main" val="0"/>
+              </a:ext>
+            </a:extLst>
+          </a:blip>
+          <a:stretch>
+            <a:fillRect/>
+          </a:stretch>
+        </p:blipFill>
+        <p:spPr>
+          <a:xfrm>
+            <a:off x="8314784" y="0"/>
+            <a:ext cx="3877216" cy="828791"/>
+          </a:xfrm>
+          <a:prstGeom prst="rect">
+            <a:avLst/>
+          </a:prstGeom>
+        </p:spPr>
+      </p:pic>
+    </p:spTree>
+    <p:extLst>
+      <p:ext uri="{BB962C8B-B14F-4D97-AF65-F5344CB8AC3E}">
+        <p14:creationId xmlns:p14="http://schemas.microsoft.com/office/powerpoint/2010/main" val="4045602233"/>
       </p:ext>
     </p:extLst>
   </p:cSld>
@@ -21866,7 +20958,7 @@
             <a:pPr algn="l"/>
             <a:r>
               <a:rPr lang="ru-RU" sz="1700" dirty="0"/>
-              <a:t>Мы взяли программу на языке C, которая решает заданную функцию: </a:t>
+              <a:t>Мы взяли программу на языке C, которая вычисляет заданную функцию: </a:t>
             </a:r>
           </a:p>
           <a:p>
@@ -22097,522 +21189,7 @@
 </p:sld>
 </file>
 
-<file path=ppt/slides/slide20.xml><?xml version="1.0" encoding="utf-8"?>
-<p:sld xmlns:a="http://schemas.openxmlformats.org/drawingml/2006/main" xmlns:r="http://schemas.openxmlformats.org/officeDocument/2006/relationships" xmlns:p="http://schemas.openxmlformats.org/presentationml/2006/main">
-  <p:cSld>
-    <p:spTree>
-      <p:nvGrpSpPr>
-        <p:cNvPr id="1" name="">
-          <a:extLst>
-            <a:ext uri="{FF2B5EF4-FFF2-40B4-BE49-F238E27FC236}">
-              <a16:creationId xmlns:a16="http://schemas.microsoft.com/office/drawing/2014/main" id="{C4C8BF6D-6408-DAA1-77B5-AB0FF7354022}"/>
-            </a:ext>
-          </a:extLst>
-        </p:cNvPr>
-        <p:cNvGrpSpPr/>
-        <p:nvPr/>
-      </p:nvGrpSpPr>
-      <p:grpSpPr>
-        <a:xfrm>
-          <a:off x="0" y="0"/>
-          <a:ext cx="0" cy="0"/>
-          <a:chOff x="0" y="0"/>
-          <a:chExt cx="0" cy="0"/>
-        </a:xfrm>
-      </p:grpSpPr>
-      <p:sp>
-        <p:nvSpPr>
-          <p:cNvPr id="3" name="Объект 2">
-            <a:extLst>
-              <a:ext uri="{FF2B5EF4-FFF2-40B4-BE49-F238E27FC236}">
-                <a16:creationId xmlns:a16="http://schemas.microsoft.com/office/drawing/2014/main" id="{D0BDBB1D-238A-45D9-630F-4E4B6F236464}"/>
-              </a:ext>
-            </a:extLst>
-          </p:cNvPr>
-          <p:cNvSpPr>
-            <a:spLocks noGrp="1"/>
-          </p:cNvSpPr>
-          <p:nvPr>
-            <p:ph idx="1"/>
-          </p:nvPr>
-        </p:nvSpPr>
-        <p:spPr>
-          <a:xfrm>
-            <a:off x="4324350" y="3187267"/>
-            <a:ext cx="3543300" cy="483466"/>
-          </a:xfrm>
-        </p:spPr>
-        <p:txBody>
-          <a:bodyPr/>
-          <a:lstStyle/>
-          <a:p>
-            <a:pPr marL="0" indent="0" algn="just">
-              <a:buNone/>
-            </a:pPr>
-            <a:r>
-              <a:rPr lang="ru-RU" dirty="0">
-                <a:latin typeface="Times New Roman" panose="02020603050405020304" pitchFamily="18" charset="0"/>
-                <a:cs typeface="Times New Roman" panose="02020603050405020304" pitchFamily="18" charset="0"/>
-              </a:rPr>
-              <a:t>Спасибо за внимание!</a:t>
-            </a:r>
-          </a:p>
-        </p:txBody>
-      </p:sp>
-      <p:sp>
-        <p:nvSpPr>
-          <p:cNvPr id="2" name="Номер слайда 1">
-            <a:extLst>
-              <a:ext uri="{FF2B5EF4-FFF2-40B4-BE49-F238E27FC236}">
-                <a16:creationId xmlns:a16="http://schemas.microsoft.com/office/drawing/2014/main" id="{F6EC9229-D156-AF9D-613F-70E205569C4D}"/>
-              </a:ext>
-            </a:extLst>
-          </p:cNvPr>
-          <p:cNvSpPr>
-            <a:spLocks noGrp="1"/>
-          </p:cNvSpPr>
-          <p:nvPr>
-            <p:ph type="sldNum" sz="quarter" idx="12"/>
-          </p:nvPr>
-        </p:nvSpPr>
-        <p:spPr/>
-        <p:txBody>
-          <a:bodyPr/>
-          <a:lstStyle/>
-          <a:p>
-            <a:fld id="{A93D2B9D-3E5A-4208-B841-6DCB29E9E020}" type="slidenum">
-              <a:rPr lang="ru-RU" smtClean="0"/>
-              <a:t>20</a:t>
-            </a:fld>
-            <a:endParaRPr lang="ru-RU"/>
-          </a:p>
-        </p:txBody>
-      </p:sp>
-      <p:pic>
-        <p:nvPicPr>
-          <p:cNvPr id="4" name="Рисунок 3" descr="Изображение выглядит как символ, Шрифт, логотип, текст&#10;&#10;Содержимое, созданное искусственным интеллектом, может быть неверным.">
-            <a:extLst>
-              <a:ext uri="{FF2B5EF4-FFF2-40B4-BE49-F238E27FC236}">
-                <a16:creationId xmlns:a16="http://schemas.microsoft.com/office/drawing/2014/main" id="{E6F95CCD-4237-E6E7-3C5B-26C3688C18CC}"/>
-              </a:ext>
-            </a:extLst>
-          </p:cNvPr>
-          <p:cNvPicPr>
-            <a:picLocks noChangeAspect="1"/>
-          </p:cNvPicPr>
-          <p:nvPr/>
-        </p:nvPicPr>
-        <p:blipFill>
-          <a:blip r:embed="rId2">
-            <a:extLst>
-              <a:ext uri="{28A0092B-C50C-407E-A947-70E740481C1C}">
-                <a14:useLocalDpi xmlns:a14="http://schemas.microsoft.com/office/drawing/2010/main" val="0"/>
-              </a:ext>
-            </a:extLst>
-          </a:blip>
-          <a:stretch>
-            <a:fillRect/>
-          </a:stretch>
-        </p:blipFill>
-        <p:spPr>
-          <a:xfrm>
-            <a:off x="8314784" y="0"/>
-            <a:ext cx="3877216" cy="828791"/>
-          </a:xfrm>
-          <a:prstGeom prst="rect">
-            <a:avLst/>
-          </a:prstGeom>
-        </p:spPr>
-      </p:pic>
-    </p:spTree>
-    <p:extLst>
-      <p:ext uri="{BB962C8B-B14F-4D97-AF65-F5344CB8AC3E}">
-        <p14:creationId xmlns:p14="http://schemas.microsoft.com/office/powerpoint/2010/main" val="4045602233"/>
-      </p:ext>
-    </p:extLst>
-  </p:cSld>
-  <p:clrMapOvr>
-    <a:masterClrMapping/>
-  </p:clrMapOvr>
-</p:sld>
-</file>
-
 <file path=ppt/slides/slide3.xml><?xml version="1.0" encoding="utf-8"?>
-<p:sld xmlns:a="http://schemas.openxmlformats.org/drawingml/2006/main" xmlns:r="http://schemas.openxmlformats.org/officeDocument/2006/relationships" xmlns:p="http://schemas.openxmlformats.org/presentationml/2006/main">
-  <p:cSld>
-    <p:spTree>
-      <p:nvGrpSpPr>
-        <p:cNvPr id="1" name=""/>
-        <p:cNvGrpSpPr/>
-        <p:nvPr/>
-      </p:nvGrpSpPr>
-      <p:grpSpPr>
-        <a:xfrm>
-          <a:off x="0" y="0"/>
-          <a:ext cx="0" cy="0"/>
-          <a:chOff x="0" y="0"/>
-          <a:chExt cx="0" cy="0"/>
-        </a:xfrm>
-      </p:grpSpPr>
-      <p:sp>
-        <p:nvSpPr>
-          <p:cNvPr id="2" name="Заголовок 1">
-            <a:extLst>
-              <a:ext uri="{FF2B5EF4-FFF2-40B4-BE49-F238E27FC236}">
-                <a16:creationId xmlns:a16="http://schemas.microsoft.com/office/drawing/2014/main" id="{4932D2BC-2DC9-3C14-321C-296222015150}"/>
-              </a:ext>
-            </a:extLst>
-          </p:cNvPr>
-          <p:cNvSpPr>
-            <a:spLocks noGrp="1"/>
-          </p:cNvSpPr>
-          <p:nvPr>
-            <p:ph type="title"/>
-          </p:nvPr>
-        </p:nvSpPr>
-        <p:spPr/>
-        <p:txBody>
-          <a:bodyPr/>
-          <a:lstStyle/>
-          <a:p>
-            <a:r>
-              <a:rPr lang="ru-RU" dirty="0"/>
-              <a:t>Энтропия. Формула Шеннона</a:t>
-            </a:r>
-          </a:p>
-        </p:txBody>
-      </p:sp>
-      <mc:AlternateContent xmlns:mc="http://schemas.openxmlformats.org/markup-compatibility/2006" xmlns:a14="http://schemas.microsoft.com/office/drawing/2010/main">
-        <mc:Choice Requires="a14">
-          <p:sp>
-            <p:nvSpPr>
-              <p:cNvPr id="3" name="Объект 2">
-                <a:extLst>
-                  <a:ext uri="{FF2B5EF4-FFF2-40B4-BE49-F238E27FC236}">
-                    <a16:creationId xmlns:a16="http://schemas.microsoft.com/office/drawing/2014/main" id="{9A8A178B-21DF-FCB8-DA73-FA6572BDA070}"/>
-                  </a:ext>
-                </a:extLst>
-              </p:cNvPr>
-              <p:cNvSpPr>
-                <a:spLocks noGrp="1"/>
-              </p:cNvSpPr>
-              <p:nvPr>
-                <p:ph idx="1"/>
-              </p:nvPr>
-            </p:nvSpPr>
-            <p:spPr/>
-            <p:txBody>
-              <a:bodyPr/>
-              <a:lstStyle/>
-              <a:p>
-                <a:pPr marL="0" indent="0">
-                  <a:buNone/>
-                </a:pPr>
-                <a:r>
-                  <a:rPr lang="ru-RU" dirty="0"/>
-                  <a:t>Энтропия – мера неопределённости или случайности данных.</a:t>
-                </a:r>
-              </a:p>
-              <a:p>
-                <a:pPr marL="0" indent="0">
-                  <a:buNone/>
-                </a:pPr>
-                <a:endParaRPr lang="ru-RU" dirty="0"/>
-              </a:p>
-              <a:p>
-                <a:pPr marL="0" indent="0">
-                  <a:buNone/>
-                </a:pPr>
-                <a14:m>
-                  <m:oMathPara xmlns:m="http://schemas.openxmlformats.org/officeDocument/2006/math">
-                    <m:oMathParaPr>
-                      <m:jc m:val="centerGroup"/>
-                    </m:oMathParaPr>
-                    <m:oMath xmlns:m="http://schemas.openxmlformats.org/officeDocument/2006/math">
-                      <m:r>
-                        <a:rPr lang="en-US" b="0" i="1" smtClean="0">
-                          <a:latin typeface="Cambria Math" panose="02040503050406030204" pitchFamily="18" charset="0"/>
-                        </a:rPr>
-                        <m:t>𝐻</m:t>
-                      </m:r>
-                      <m:d>
-                        <m:dPr>
-                          <m:ctrlPr>
-                            <a:rPr lang="en-US" b="0" i="1" smtClean="0">
-                              <a:latin typeface="Cambria Math" panose="02040503050406030204" pitchFamily="18" charset="0"/>
-                            </a:rPr>
-                          </m:ctrlPr>
-                        </m:dPr>
-                        <m:e>
-                          <m:r>
-                            <a:rPr lang="en-US" b="0" i="1" smtClean="0">
-                              <a:latin typeface="Cambria Math" panose="02040503050406030204" pitchFamily="18" charset="0"/>
-                            </a:rPr>
-                            <m:t>𝑥</m:t>
-                          </m:r>
-                        </m:e>
-                      </m:d>
-                      <m:r>
-                        <a:rPr lang="en-US" b="0" i="1" smtClean="0">
-                          <a:latin typeface="Cambria Math" panose="02040503050406030204" pitchFamily="18" charset="0"/>
-                        </a:rPr>
-                        <m:t>=−</m:t>
-                      </m:r>
-                      <m:nary>
-                        <m:naryPr>
-                          <m:chr m:val="∑"/>
-                          <m:ctrlPr>
-                            <a:rPr lang="en-US" b="0" i="1" smtClean="0">
-                              <a:latin typeface="Cambria Math" panose="02040503050406030204" pitchFamily="18" charset="0"/>
-                            </a:rPr>
-                          </m:ctrlPr>
-                        </m:naryPr>
-                        <m:sub>
-                          <m:r>
-                            <m:rPr>
-                              <m:brk m:alnAt="23"/>
-                            </m:rPr>
-                            <a:rPr lang="en-US" b="0" i="1" smtClean="0">
-                              <a:latin typeface="Cambria Math" panose="02040503050406030204" pitchFamily="18" charset="0"/>
-                            </a:rPr>
-                            <m:t>𝑖</m:t>
-                          </m:r>
-                          <m:r>
-                            <a:rPr lang="en-US" b="0" i="1" smtClean="0">
-                              <a:latin typeface="Cambria Math" panose="02040503050406030204" pitchFamily="18" charset="0"/>
-                            </a:rPr>
-                            <m:t>=1</m:t>
-                          </m:r>
-                        </m:sub>
-                        <m:sup>
-                          <m:r>
-                            <a:rPr lang="en-US" b="0" i="1" smtClean="0">
-                              <a:latin typeface="Cambria Math" panose="02040503050406030204" pitchFamily="18" charset="0"/>
-                            </a:rPr>
-                            <m:t>𝑛</m:t>
-                          </m:r>
-                        </m:sup>
-                        <m:e>
-                          <m:sSub>
-                            <m:sSubPr>
-                              <m:ctrlPr>
-                                <a:rPr lang="en-US" b="0" i="1" smtClean="0">
-                                  <a:latin typeface="Cambria Math" panose="02040503050406030204" pitchFamily="18" charset="0"/>
-                                </a:rPr>
-                              </m:ctrlPr>
-                            </m:sSubPr>
-                            <m:e>
-                              <m:r>
-                                <a:rPr lang="en-US" b="0" i="1" smtClean="0">
-                                  <a:latin typeface="Cambria Math" panose="02040503050406030204" pitchFamily="18" charset="0"/>
-                                </a:rPr>
-                                <m:t>𝑝</m:t>
-                              </m:r>
-                            </m:e>
-                            <m:sub>
-                              <m:r>
-                                <a:rPr lang="en-US" b="0" i="1" smtClean="0">
-                                  <a:latin typeface="Cambria Math" panose="02040503050406030204" pitchFamily="18" charset="0"/>
-                                </a:rPr>
-                                <m:t>𝑖</m:t>
-                              </m:r>
-                            </m:sub>
-                          </m:sSub>
-                          <m:func>
-                            <m:funcPr>
-                              <m:ctrlPr>
-                                <a:rPr lang="en-US" b="0" i="1" smtClean="0">
-                                  <a:latin typeface="Cambria Math" panose="02040503050406030204" pitchFamily="18" charset="0"/>
-                                </a:rPr>
-                              </m:ctrlPr>
-                            </m:funcPr>
-                            <m:fName>
-                              <m:sSub>
-                                <m:sSubPr>
-                                  <m:ctrlPr>
-                                    <a:rPr lang="en-US" b="0" i="1" smtClean="0">
-                                      <a:latin typeface="Cambria Math" panose="02040503050406030204" pitchFamily="18" charset="0"/>
-                                    </a:rPr>
-                                  </m:ctrlPr>
-                                </m:sSubPr>
-                                <m:e>
-                                  <m:r>
-                                    <m:rPr>
-                                      <m:sty m:val="p"/>
-                                    </m:rPr>
-                                    <a:rPr lang="en-US" b="0" i="0" smtClean="0">
-                                      <a:latin typeface="Cambria Math" panose="02040503050406030204" pitchFamily="18" charset="0"/>
-                                    </a:rPr>
-                                    <m:t>log</m:t>
-                                  </m:r>
-                                </m:e>
-                                <m:sub>
-                                  <m:r>
-                                    <a:rPr lang="en-US" b="0" i="1" smtClean="0">
-                                      <a:latin typeface="Cambria Math" panose="02040503050406030204" pitchFamily="18" charset="0"/>
-                                    </a:rPr>
-                                    <m:t>2</m:t>
-                                  </m:r>
-                                </m:sub>
-                              </m:sSub>
-                            </m:fName>
-                            <m:e>
-                              <m:sSub>
-                                <m:sSubPr>
-                                  <m:ctrlPr>
-                                    <a:rPr lang="en-US" b="0" i="1" smtClean="0">
-                                      <a:latin typeface="Cambria Math" panose="02040503050406030204" pitchFamily="18" charset="0"/>
-                                    </a:rPr>
-                                  </m:ctrlPr>
-                                </m:sSubPr>
-                                <m:e>
-                                  <m:r>
-                                    <a:rPr lang="en-US" b="0" i="1" smtClean="0">
-                                      <a:latin typeface="Cambria Math" panose="02040503050406030204" pitchFamily="18" charset="0"/>
-                                    </a:rPr>
-                                    <m:t>𝑝</m:t>
-                                  </m:r>
-                                </m:e>
-                                <m:sub>
-                                  <m:r>
-                                    <a:rPr lang="en-US" b="0" i="1" smtClean="0">
-                                      <a:latin typeface="Cambria Math" panose="02040503050406030204" pitchFamily="18" charset="0"/>
-                                    </a:rPr>
-                                    <m:t>𝑖</m:t>
-                                  </m:r>
-                                </m:sub>
-                              </m:sSub>
-                            </m:e>
-                          </m:func>
-                        </m:e>
-                      </m:nary>
-                    </m:oMath>
-                  </m:oMathPara>
-                </a14:m>
-                <a:endParaRPr lang="ru-RU" dirty="0"/>
-              </a:p>
-            </p:txBody>
-          </p:sp>
-        </mc:Choice>
-        <mc:Fallback xmlns="">
-          <p:sp>
-            <p:nvSpPr>
-              <p:cNvPr id="3" name="Объект 2">
-                <a:extLst>
-                  <a:ext uri="{FF2B5EF4-FFF2-40B4-BE49-F238E27FC236}">
-                    <a16:creationId xmlns:a16="http://schemas.microsoft.com/office/drawing/2014/main" id="{9A8A178B-21DF-FCB8-DA73-FA6572BDA070}"/>
-                  </a:ext>
-                </a:extLst>
-              </p:cNvPr>
-              <p:cNvSpPr>
-                <a:spLocks noGrp="1" noRot="1" noChangeAspect="1" noMove="1" noResize="1" noEditPoints="1" noAdjustHandles="1" noChangeArrowheads="1" noChangeShapeType="1" noTextEdit="1"/>
-              </p:cNvSpPr>
-              <p:nvPr>
-                <p:ph idx="1"/>
-              </p:nvPr>
-            </p:nvSpPr>
-            <p:spPr>
-              <a:blipFill>
-                <a:blip r:embed="rId2"/>
-                <a:stretch>
-                  <a:fillRect l="-1217" t="-2241"/>
-                </a:stretch>
-              </a:blipFill>
-            </p:spPr>
-            <p:txBody>
-              <a:bodyPr/>
-              <a:lstStyle/>
-              <a:p>
-                <a:r>
-                  <a:rPr lang="ru-RU">
-                    <a:noFill/>
-                  </a:rPr>
-                  <a:t> </a:t>
-                </a:r>
-              </a:p>
-            </p:txBody>
-          </p:sp>
-        </mc:Fallback>
-      </mc:AlternateContent>
-      <p:sp>
-        <p:nvSpPr>
-          <p:cNvPr id="4" name="Номер слайда 3">
-            <a:extLst>
-              <a:ext uri="{FF2B5EF4-FFF2-40B4-BE49-F238E27FC236}">
-                <a16:creationId xmlns:a16="http://schemas.microsoft.com/office/drawing/2014/main" id="{DB91A22D-E2E6-891C-E6E4-5630E388129A}"/>
-              </a:ext>
-            </a:extLst>
-          </p:cNvPr>
-          <p:cNvSpPr>
-            <a:spLocks noGrp="1"/>
-          </p:cNvSpPr>
-          <p:nvPr>
-            <p:ph type="sldNum" sz="quarter" idx="12"/>
-          </p:nvPr>
-        </p:nvSpPr>
-        <p:spPr/>
-        <p:txBody>
-          <a:bodyPr/>
-          <a:lstStyle/>
-          <a:p>
-            <a:fld id="{8CC8C628-6975-4CC2-A0F1-47F458287FF0}" type="slidenum">
-              <a:rPr lang="ru-RU" smtClean="0"/>
-              <a:t>3</a:t>
-            </a:fld>
-            <a:endParaRPr lang="ru-RU"/>
-          </a:p>
-        </p:txBody>
-      </p:sp>
-      <p:pic>
-        <p:nvPicPr>
-          <p:cNvPr id="5" name="Рисунок 4" descr="Изображение выглядит как символ, Шрифт, логотип, текст&#10;&#10;Содержимое, созданное искусственным интеллектом, может быть неверным.">
-            <a:extLst>
-              <a:ext uri="{FF2B5EF4-FFF2-40B4-BE49-F238E27FC236}">
-                <a16:creationId xmlns:a16="http://schemas.microsoft.com/office/drawing/2014/main" id="{B4C71B12-648F-6F6E-C075-D5E5DEE866D5}"/>
-              </a:ext>
-            </a:extLst>
-          </p:cNvPr>
-          <p:cNvPicPr>
-            <a:picLocks noChangeAspect="1"/>
-          </p:cNvPicPr>
-          <p:nvPr/>
-        </p:nvPicPr>
-        <p:blipFill>
-          <a:blip r:embed="rId3">
-            <a:extLst>
-              <a:ext uri="{28A0092B-C50C-407E-A947-70E740481C1C}">
-                <a14:useLocalDpi xmlns:a14="http://schemas.microsoft.com/office/drawing/2010/main" val="0"/>
-              </a:ext>
-            </a:extLst>
-          </a:blip>
-          <a:stretch>
-            <a:fillRect/>
-          </a:stretch>
-        </p:blipFill>
-        <p:spPr>
-          <a:xfrm>
-            <a:off x="8314784" y="0"/>
-            <a:ext cx="3877216" cy="828791"/>
-          </a:xfrm>
-          <a:prstGeom prst="rect">
-            <a:avLst/>
-          </a:prstGeom>
-        </p:spPr>
-      </p:pic>
-    </p:spTree>
-    <p:extLst>
-      <p:ext uri="{BB962C8B-B14F-4D97-AF65-F5344CB8AC3E}">
-        <p14:creationId xmlns:p14="http://schemas.microsoft.com/office/powerpoint/2010/main" val="519850435"/>
-      </p:ext>
-    </p:extLst>
-  </p:cSld>
-  <p:clrMapOvr>
-    <a:masterClrMapping/>
-  </p:clrMapOvr>
-</p:sld>
-</file>
-
-<file path=ppt/slides/slide4.xml><?xml version="1.0" encoding="utf-8"?>
 <p:sld xmlns:a="http://schemas.openxmlformats.org/drawingml/2006/main" xmlns:r="http://schemas.openxmlformats.org/officeDocument/2006/relationships" xmlns:p="http://schemas.openxmlformats.org/presentationml/2006/main">
   <p:cSld>
     <p:spTree>
@@ -23108,7 +21685,7 @@
           <a:p>
             <a:fld id="{8CC8C628-6975-4CC2-A0F1-47F458287FF0}" type="slidenum">
               <a:rPr lang="ru-RU" smtClean="0"/>
-              <a:t>4</a:t>
+              <a:t>3</a:t>
             </a:fld>
             <a:endParaRPr lang="ru-RU"/>
           </a:p>
@@ -23596,7 +22173,7 @@
 </p:sld>
 </file>
 
-<file path=ppt/slides/slide5.xml><?xml version="1.0" encoding="utf-8"?>
+<file path=ppt/slides/slide4.xml><?xml version="1.0" encoding="utf-8"?>
 <p:sld xmlns:a="http://schemas.openxmlformats.org/drawingml/2006/main" xmlns:r="http://schemas.openxmlformats.org/officeDocument/2006/relationships" xmlns:p="http://schemas.openxmlformats.org/presentationml/2006/main">
   <p:cSld>
     <p:spTree>
@@ -24092,7 +22669,7 @@
           <a:p>
             <a:fld id="{8CC8C628-6975-4CC2-A0F1-47F458287FF0}" type="slidenum">
               <a:rPr lang="ru-RU" smtClean="0"/>
-              <a:t>5</a:t>
+              <a:t>4</a:t>
             </a:fld>
             <a:endParaRPr lang="ru-RU"/>
           </a:p>
@@ -24580,7 +23157,7 @@
 </p:sld>
 </file>
 
-<file path=ppt/slides/slide6.xml><?xml version="1.0" encoding="utf-8"?>
+<file path=ppt/slides/slide5.xml><?xml version="1.0" encoding="utf-8"?>
 <p:sld xmlns:a="http://schemas.openxmlformats.org/drawingml/2006/main" xmlns:r="http://schemas.openxmlformats.org/officeDocument/2006/relationships" xmlns:p="http://schemas.openxmlformats.org/presentationml/2006/main">
   <p:cSld>
     <p:spTree>
@@ -25072,7 +23649,7 @@
           <a:p>
             <a:fld id="{8CC8C628-6975-4CC2-A0F1-47F458287FF0}" type="slidenum">
               <a:rPr lang="ru-RU" smtClean="0"/>
-              <a:t>6</a:t>
+              <a:t>5</a:t>
             </a:fld>
             <a:endParaRPr lang="ru-RU"/>
           </a:p>
@@ -25640,7 +24217,7 @@
 </p:sld>
 </file>
 
-<file path=ppt/slides/slide7.xml><?xml version="1.0" encoding="utf-8"?>
+<file path=ppt/slides/slide6.xml><?xml version="1.0" encoding="utf-8"?>
 <p:sld xmlns:a="http://schemas.openxmlformats.org/drawingml/2006/main" xmlns:r="http://schemas.openxmlformats.org/officeDocument/2006/relationships" xmlns:p="http://schemas.openxmlformats.org/presentationml/2006/main">
   <p:cSld>
     <p:spTree>
@@ -26132,7 +24709,7 @@
           <a:p>
             <a:fld id="{8CC8C628-6975-4CC2-A0F1-47F458287FF0}" type="slidenum">
               <a:rPr lang="ru-RU" smtClean="0"/>
-              <a:t>7</a:t>
+              <a:t>6</a:t>
             </a:fld>
             <a:endParaRPr lang="ru-RU"/>
           </a:p>
@@ -26656,7 +25233,7 @@
 </p:sld>
 </file>
 
-<file path=ppt/slides/slide8.xml><?xml version="1.0" encoding="utf-8"?>
+<file path=ppt/slides/slide7.xml><?xml version="1.0" encoding="utf-8"?>
 <p:sld xmlns:a="http://schemas.openxmlformats.org/drawingml/2006/main" xmlns:r="http://schemas.openxmlformats.org/officeDocument/2006/relationships" xmlns:p="http://schemas.openxmlformats.org/presentationml/2006/main">
   <p:cSld>
     <p:spTree>
@@ -27148,7 +25725,7 @@
           <a:p>
             <a:fld id="{8CC8C628-6975-4CC2-A0F1-47F458287FF0}" type="slidenum">
               <a:rPr lang="ru-RU" smtClean="0"/>
-              <a:t>8</a:t>
+              <a:t>7</a:t>
             </a:fld>
             <a:endParaRPr lang="ru-RU"/>
           </a:p>
@@ -27688,7 +26265,7 @@
 </p:sld>
 </file>
 
-<file path=ppt/slides/slide9.xml><?xml version="1.0" encoding="utf-8"?>
+<file path=ppt/slides/slide8.xml><?xml version="1.0" encoding="utf-8"?>
 <p:sld xmlns:a="http://schemas.openxmlformats.org/drawingml/2006/main" xmlns:r="http://schemas.openxmlformats.org/officeDocument/2006/relationships" xmlns:p="http://schemas.openxmlformats.org/presentationml/2006/main">
   <p:cSld>
     <p:spTree>
@@ -28168,7 +26745,7 @@
           <a:p>
             <a:fld id="{8CC8C628-6975-4CC2-A0F1-47F458287FF0}" type="slidenum">
               <a:rPr lang="ru-RU" smtClean="0"/>
-              <a:t>9</a:t>
+              <a:t>8</a:t>
             </a:fld>
             <a:endParaRPr lang="ru-RU"/>
           </a:p>
@@ -28699,6 +27276,1053 @@
     <p:extLst>
       <p:ext uri="{BB962C8B-B14F-4D97-AF65-F5344CB8AC3E}">
         <p14:creationId xmlns:p14="http://schemas.microsoft.com/office/powerpoint/2010/main" val="2138276679"/>
+      </p:ext>
+    </p:extLst>
+  </p:cSld>
+  <p:clrMapOvr>
+    <a:masterClrMapping/>
+  </p:clrMapOvr>
+</p:sld>
+</file>
+
+<file path=ppt/slides/slide9.xml><?xml version="1.0" encoding="utf-8"?>
+<p:sld xmlns:a="http://schemas.openxmlformats.org/drawingml/2006/main" xmlns:r="http://schemas.openxmlformats.org/officeDocument/2006/relationships" xmlns:p="http://schemas.openxmlformats.org/presentationml/2006/main">
+  <p:cSld>
+    <p:spTree>
+      <p:nvGrpSpPr>
+        <p:cNvPr id="1" name="">
+          <a:extLst>
+            <a:ext uri="{FF2B5EF4-FFF2-40B4-BE49-F238E27FC236}">
+              <a16:creationId xmlns:a16="http://schemas.microsoft.com/office/drawing/2014/main" id="{F1AEF9CA-D7BE-49E5-2F16-6D5F93AB9368}"/>
+            </a:ext>
+          </a:extLst>
+        </p:cNvPr>
+        <p:cNvGrpSpPr/>
+        <p:nvPr/>
+      </p:nvGrpSpPr>
+      <p:grpSpPr>
+        <a:xfrm>
+          <a:off x="0" y="0"/>
+          <a:ext cx="0" cy="0"/>
+          <a:chOff x="0" y="0"/>
+          <a:chExt cx="0" cy="0"/>
+        </a:xfrm>
+      </p:grpSpPr>
+      <p:graphicFrame>
+        <p:nvGraphicFramePr>
+          <p:cNvPr id="10" name="Таблица 9">
+            <a:extLst>
+              <a:ext uri="{FF2B5EF4-FFF2-40B4-BE49-F238E27FC236}">
+                <a16:creationId xmlns:a16="http://schemas.microsoft.com/office/drawing/2014/main" id="{E8B97E1D-7C40-D674-A766-1BD510F1BA32}"/>
+              </a:ext>
+            </a:extLst>
+          </p:cNvPr>
+          <p:cNvGraphicFramePr>
+            <a:graphicFrameLocks noGrp="1"/>
+          </p:cNvGraphicFramePr>
+          <p:nvPr>
+            <p:extLst>
+              <p:ext uri="{D42A27DB-BD31-4B8C-83A1-F6EECF244321}">
+                <p14:modId xmlns:p14="http://schemas.microsoft.com/office/powerpoint/2010/main" val="712024485"/>
+              </p:ext>
+            </p:extLst>
+          </p:nvPr>
+        </p:nvGraphicFramePr>
+        <p:xfrm>
+          <a:off x="8839325" y="2780940"/>
+          <a:ext cx="2828133" cy="461287"/>
+        </p:xfrm>
+        <a:graphic>
+          <a:graphicData uri="http://schemas.openxmlformats.org/drawingml/2006/table">
+            <a:tbl>
+              <a:tblPr firstRow="1" bandRow="1">
+                <a:tableStyleId>{5C22544A-7EE6-4342-B048-85BDC9FD1C3A}</a:tableStyleId>
+              </a:tblPr>
+              <a:tblGrid>
+                <a:gridCol w="1269016">
+                  <a:extLst>
+                    <a:ext uri="{9D8B030D-6E8A-4147-A177-3AD203B41FA5}">
+                      <a16:colId xmlns:a16="http://schemas.microsoft.com/office/drawing/2014/main" val="3852776436"/>
+                    </a:ext>
+                  </a:extLst>
+                </a:gridCol>
+                <a:gridCol w="1559117">
+                  <a:extLst>
+                    <a:ext uri="{9D8B030D-6E8A-4147-A177-3AD203B41FA5}">
+                      <a16:colId xmlns:a16="http://schemas.microsoft.com/office/drawing/2014/main" val="1792951911"/>
+                    </a:ext>
+                  </a:extLst>
+                </a:gridCol>
+              </a:tblGrid>
+              <a:tr h="461287">
+                <a:tc>
+                  <a:txBody>
+                    <a:bodyPr/>
+                    <a:lstStyle/>
+                    <a:p>
+                      <a:pPr algn="ctr"/>
+                      <a:r>
+                        <a:rPr lang="ru-RU" dirty="0">
+                          <a:solidFill>
+                            <a:schemeClr val="tx1"/>
+                          </a:solidFill>
+                        </a:rPr>
+                        <a:t>Размер</a:t>
+                      </a:r>
+                    </a:p>
+                  </a:txBody>
+                  <a:tcPr anchor="ctr">
+                    <a:lnL w="12700" cap="flat" cmpd="sng" algn="ctr">
+                      <a:solidFill>
+                        <a:schemeClr val="tx1"/>
+                      </a:solidFill>
+                      <a:prstDash val="solid"/>
+                      <a:round/>
+                      <a:headEnd type="none" w="med" len="med"/>
+                      <a:tailEnd type="none" w="med" len="med"/>
+                    </a:lnL>
+                    <a:lnR w="12700" cap="flat" cmpd="sng" algn="ctr">
+                      <a:solidFill>
+                        <a:schemeClr val="tx1"/>
+                      </a:solidFill>
+                      <a:prstDash val="solid"/>
+                      <a:round/>
+                      <a:headEnd type="none" w="med" len="med"/>
+                      <a:tailEnd type="none" w="med" len="med"/>
+                    </a:lnR>
+                    <a:lnT w="12700" cap="flat" cmpd="sng" algn="ctr">
+                      <a:solidFill>
+                        <a:schemeClr val="tx1"/>
+                      </a:solidFill>
+                      <a:prstDash val="solid"/>
+                      <a:round/>
+                      <a:headEnd type="none" w="med" len="med"/>
+                      <a:tailEnd type="none" w="med" len="med"/>
+                    </a:lnT>
+                    <a:lnB w="12700" cap="flat" cmpd="sng" algn="ctr">
+                      <a:solidFill>
+                        <a:schemeClr val="tx1"/>
+                      </a:solidFill>
+                      <a:prstDash val="solid"/>
+                      <a:round/>
+                      <a:headEnd type="none" w="med" len="med"/>
+                      <a:tailEnd type="none" w="med" len="med"/>
+                    </a:lnB>
+                    <a:lnTlToBr w="12700" cmpd="sng">
+                      <a:noFill/>
+                      <a:prstDash val="solid"/>
+                    </a:lnTlToBr>
+                    <a:lnBlToTr w="12700" cmpd="sng">
+                      <a:noFill/>
+                      <a:prstDash val="solid"/>
+                    </a:lnBlToTr>
+                    <a:solidFill>
+                      <a:schemeClr val="bg1"/>
+                    </a:solidFill>
+                  </a:tcPr>
+                </a:tc>
+                <a:tc>
+                  <a:txBody>
+                    <a:bodyPr/>
+                    <a:lstStyle/>
+                    <a:p>
+                      <a:pPr marL="0" marR="0" lvl="0" indent="0" algn="ctr" defTabSz="914400" rtl="0" eaLnBrk="1" fontAlgn="auto" latinLnBrk="0" hangingPunct="1">
+                        <a:lnSpc>
+                          <a:spcPct val="100000"/>
+                        </a:lnSpc>
+                        <a:spcBef>
+                          <a:spcPts val="0"/>
+                        </a:spcBef>
+                        <a:spcAft>
+                          <a:spcPts val="0"/>
+                        </a:spcAft>
+                        <a:buClrTx/>
+                        <a:buSzTx/>
+                        <a:buFontTx/>
+                        <a:buNone/>
+                        <a:tabLst/>
+                        <a:defRPr/>
+                      </a:pPr>
+                      <a:r>
+                        <a:rPr lang="ru-RU" dirty="0">
+                          <a:solidFill>
+                            <a:schemeClr val="tx1"/>
+                          </a:solidFill>
+                        </a:rPr>
+                        <a:t>73 Кб</a:t>
+                      </a:r>
+                    </a:p>
+                  </a:txBody>
+                  <a:tcPr anchor="ctr">
+                    <a:lnL w="12700" cap="flat" cmpd="sng" algn="ctr">
+                      <a:solidFill>
+                        <a:schemeClr val="tx1"/>
+                      </a:solidFill>
+                      <a:prstDash val="solid"/>
+                      <a:round/>
+                      <a:headEnd type="none" w="med" len="med"/>
+                      <a:tailEnd type="none" w="med" len="med"/>
+                    </a:lnL>
+                    <a:lnR w="12700" cap="flat" cmpd="sng" algn="ctr">
+                      <a:solidFill>
+                        <a:schemeClr val="tx1"/>
+                      </a:solidFill>
+                      <a:prstDash val="solid"/>
+                      <a:round/>
+                      <a:headEnd type="none" w="med" len="med"/>
+                      <a:tailEnd type="none" w="med" len="med"/>
+                    </a:lnR>
+                    <a:lnT w="12700" cap="flat" cmpd="sng" algn="ctr">
+                      <a:solidFill>
+                        <a:schemeClr val="tx1"/>
+                      </a:solidFill>
+                      <a:prstDash val="solid"/>
+                      <a:round/>
+                      <a:headEnd type="none" w="med" len="med"/>
+                      <a:tailEnd type="none" w="med" len="med"/>
+                    </a:lnT>
+                    <a:lnB w="12700" cap="flat" cmpd="sng" algn="ctr">
+                      <a:solidFill>
+                        <a:schemeClr val="tx1"/>
+                      </a:solidFill>
+                      <a:prstDash val="solid"/>
+                      <a:round/>
+                      <a:headEnd type="none" w="med" len="med"/>
+                      <a:tailEnd type="none" w="med" len="med"/>
+                    </a:lnB>
+                    <a:lnTlToBr w="12700" cmpd="sng">
+                      <a:noFill/>
+                      <a:prstDash val="solid"/>
+                    </a:lnTlToBr>
+                    <a:lnBlToTr w="12700" cmpd="sng">
+                      <a:noFill/>
+                      <a:prstDash val="solid"/>
+                    </a:lnBlToTr>
+                    <a:solidFill>
+                      <a:schemeClr val="bg1"/>
+                    </a:solidFill>
+                  </a:tcPr>
+                </a:tc>
+                <a:extLst>
+                  <a:ext uri="{0D108BD9-81ED-4DB2-BD59-A6C34878D82A}">
+                    <a16:rowId xmlns:a16="http://schemas.microsoft.com/office/drawing/2014/main" val="1488891872"/>
+                  </a:ext>
+                </a:extLst>
+              </a:tr>
+            </a:tbl>
+          </a:graphicData>
+        </a:graphic>
+      </p:graphicFrame>
+      <p:graphicFrame>
+        <p:nvGraphicFramePr>
+          <p:cNvPr id="11" name="Таблица 10">
+            <a:extLst>
+              <a:ext uri="{FF2B5EF4-FFF2-40B4-BE49-F238E27FC236}">
+                <a16:creationId xmlns:a16="http://schemas.microsoft.com/office/drawing/2014/main" id="{138E18FB-F347-270D-116B-3E99839544EF}"/>
+              </a:ext>
+            </a:extLst>
+          </p:cNvPr>
+          <p:cNvGraphicFramePr>
+            <a:graphicFrameLocks noGrp="1"/>
+          </p:cNvGraphicFramePr>
+          <p:nvPr>
+            <p:extLst>
+              <p:ext uri="{D42A27DB-BD31-4B8C-83A1-F6EECF244321}">
+                <p14:modId xmlns:p14="http://schemas.microsoft.com/office/powerpoint/2010/main" val="2039856514"/>
+              </p:ext>
+            </p:extLst>
+          </p:nvPr>
+        </p:nvGraphicFramePr>
+        <p:xfrm>
+          <a:off x="8851320" y="1983991"/>
+          <a:ext cx="2828133" cy="410982"/>
+        </p:xfrm>
+        <a:graphic>
+          <a:graphicData uri="http://schemas.openxmlformats.org/drawingml/2006/table">
+            <a:tbl>
+              <a:tblPr firstRow="1" bandRow="1">
+                <a:tableStyleId>{5C22544A-7EE6-4342-B048-85BDC9FD1C3A}</a:tableStyleId>
+              </a:tblPr>
+              <a:tblGrid>
+                <a:gridCol w="1269016">
+                  <a:extLst>
+                    <a:ext uri="{9D8B030D-6E8A-4147-A177-3AD203B41FA5}">
+                      <a16:colId xmlns:a16="http://schemas.microsoft.com/office/drawing/2014/main" val="3852776436"/>
+                    </a:ext>
+                  </a:extLst>
+                </a:gridCol>
+                <a:gridCol w="1559117">
+                  <a:extLst>
+                    <a:ext uri="{9D8B030D-6E8A-4147-A177-3AD203B41FA5}">
+                      <a16:colId xmlns:a16="http://schemas.microsoft.com/office/drawing/2014/main" val="1792951911"/>
+                    </a:ext>
+                  </a:extLst>
+                </a:gridCol>
+              </a:tblGrid>
+              <a:tr h="410982">
+                <a:tc>
+                  <a:txBody>
+                    <a:bodyPr/>
+                    <a:lstStyle/>
+                    <a:p>
+                      <a:pPr algn="ctr"/>
+                      <a:r>
+                        <a:rPr lang="ru-RU" dirty="0">
+                          <a:solidFill>
+                            <a:schemeClr val="tx1"/>
+                          </a:solidFill>
+                        </a:rPr>
+                        <a:t>Энтропия</a:t>
+                      </a:r>
+                    </a:p>
+                  </a:txBody>
+                  <a:tcPr anchor="ctr">
+                    <a:lnL w="12700" cap="flat" cmpd="sng" algn="ctr">
+                      <a:solidFill>
+                        <a:schemeClr val="tx1"/>
+                      </a:solidFill>
+                      <a:prstDash val="solid"/>
+                      <a:round/>
+                      <a:headEnd type="none" w="med" len="med"/>
+                      <a:tailEnd type="none" w="med" len="med"/>
+                    </a:lnL>
+                    <a:lnR w="12700" cap="flat" cmpd="sng" algn="ctr">
+                      <a:solidFill>
+                        <a:schemeClr val="tx1"/>
+                      </a:solidFill>
+                      <a:prstDash val="solid"/>
+                      <a:round/>
+                      <a:headEnd type="none" w="med" len="med"/>
+                      <a:tailEnd type="none" w="med" len="med"/>
+                    </a:lnR>
+                    <a:lnT w="12700" cap="flat" cmpd="sng" algn="ctr">
+                      <a:solidFill>
+                        <a:schemeClr val="tx1"/>
+                      </a:solidFill>
+                      <a:prstDash val="solid"/>
+                      <a:round/>
+                      <a:headEnd type="none" w="med" len="med"/>
+                      <a:tailEnd type="none" w="med" len="med"/>
+                    </a:lnT>
+                    <a:lnB w="12700" cap="flat" cmpd="sng" algn="ctr">
+                      <a:solidFill>
+                        <a:schemeClr val="tx1"/>
+                      </a:solidFill>
+                      <a:prstDash val="solid"/>
+                      <a:round/>
+                      <a:headEnd type="none" w="med" len="med"/>
+                      <a:tailEnd type="none" w="med" len="med"/>
+                    </a:lnB>
+                    <a:lnTlToBr w="12700" cmpd="sng">
+                      <a:noFill/>
+                      <a:prstDash val="solid"/>
+                    </a:lnTlToBr>
+                    <a:lnBlToTr w="12700" cmpd="sng">
+                      <a:noFill/>
+                      <a:prstDash val="solid"/>
+                    </a:lnBlToTr>
+                    <a:solidFill>
+                      <a:schemeClr val="bg1"/>
+                    </a:solidFill>
+                  </a:tcPr>
+                </a:tc>
+                <a:tc>
+                  <a:txBody>
+                    <a:bodyPr/>
+                    <a:lstStyle/>
+                    <a:p>
+                      <a:pPr marL="0" marR="0" lvl="0" indent="0" algn="ctr" defTabSz="914400" rtl="0" eaLnBrk="1" fontAlgn="auto" latinLnBrk="0" hangingPunct="1">
+                        <a:lnSpc>
+                          <a:spcPct val="100000"/>
+                        </a:lnSpc>
+                        <a:spcBef>
+                          <a:spcPts val="0"/>
+                        </a:spcBef>
+                        <a:spcAft>
+                          <a:spcPts val="0"/>
+                        </a:spcAft>
+                        <a:buClrTx/>
+                        <a:buSzTx/>
+                        <a:buFontTx/>
+                        <a:buNone/>
+                        <a:tabLst/>
+                        <a:defRPr/>
+                      </a:pPr>
+                      <a:r>
+                        <a:rPr lang="ru-RU" dirty="0">
+                          <a:solidFill>
+                            <a:schemeClr val="tx1"/>
+                          </a:solidFill>
+                        </a:rPr>
+                        <a:t>7.97</a:t>
+                      </a:r>
+                    </a:p>
+                  </a:txBody>
+                  <a:tcPr anchor="ctr">
+                    <a:lnL w="12700" cap="flat" cmpd="sng" algn="ctr">
+                      <a:solidFill>
+                        <a:schemeClr val="tx1"/>
+                      </a:solidFill>
+                      <a:prstDash val="solid"/>
+                      <a:round/>
+                      <a:headEnd type="none" w="med" len="med"/>
+                      <a:tailEnd type="none" w="med" len="med"/>
+                    </a:lnL>
+                    <a:lnR w="12700" cap="flat" cmpd="sng" algn="ctr">
+                      <a:solidFill>
+                        <a:schemeClr val="tx1"/>
+                      </a:solidFill>
+                      <a:prstDash val="solid"/>
+                      <a:round/>
+                      <a:headEnd type="none" w="med" len="med"/>
+                      <a:tailEnd type="none" w="med" len="med"/>
+                    </a:lnR>
+                    <a:lnT w="12700" cap="flat" cmpd="sng" algn="ctr">
+                      <a:solidFill>
+                        <a:schemeClr val="tx1"/>
+                      </a:solidFill>
+                      <a:prstDash val="solid"/>
+                      <a:round/>
+                      <a:headEnd type="none" w="med" len="med"/>
+                      <a:tailEnd type="none" w="med" len="med"/>
+                    </a:lnT>
+                    <a:lnB w="12700" cap="flat" cmpd="sng" algn="ctr">
+                      <a:solidFill>
+                        <a:schemeClr val="tx1"/>
+                      </a:solidFill>
+                      <a:prstDash val="solid"/>
+                      <a:round/>
+                      <a:headEnd type="none" w="med" len="med"/>
+                      <a:tailEnd type="none" w="med" len="med"/>
+                    </a:lnB>
+                    <a:lnTlToBr w="12700" cmpd="sng">
+                      <a:noFill/>
+                      <a:prstDash val="solid"/>
+                    </a:lnTlToBr>
+                    <a:lnBlToTr w="12700" cmpd="sng">
+                      <a:noFill/>
+                      <a:prstDash val="solid"/>
+                    </a:lnBlToTr>
+                    <a:solidFill>
+                      <a:schemeClr val="bg1"/>
+                    </a:solidFill>
+                  </a:tcPr>
+                </a:tc>
+                <a:extLst>
+                  <a:ext uri="{0D108BD9-81ED-4DB2-BD59-A6C34878D82A}">
+                    <a16:rowId xmlns:a16="http://schemas.microsoft.com/office/drawing/2014/main" val="1488891872"/>
+                  </a:ext>
+                </a:extLst>
+              </a:tr>
+            </a:tbl>
+          </a:graphicData>
+        </a:graphic>
+      </p:graphicFrame>
+      <p:pic>
+        <p:nvPicPr>
+          <p:cNvPr id="6" name="Рисунок 5" descr="Изображение выглядит как символ, Шрифт, логотип, текст&#10;&#10;Содержимое, созданное искусственным интеллектом, может быть неверным.">
+            <a:extLst>
+              <a:ext uri="{FF2B5EF4-FFF2-40B4-BE49-F238E27FC236}">
+                <a16:creationId xmlns:a16="http://schemas.microsoft.com/office/drawing/2014/main" id="{536F0575-4D35-5C05-CA72-4FA21A984455}"/>
+              </a:ext>
+            </a:extLst>
+          </p:cNvPr>
+          <p:cNvPicPr>
+            <a:picLocks noChangeAspect="1"/>
+          </p:cNvPicPr>
+          <p:nvPr/>
+        </p:nvPicPr>
+        <p:blipFill>
+          <a:blip r:embed="rId2">
+            <a:extLst>
+              <a:ext uri="{28A0092B-C50C-407E-A947-70E740481C1C}">
+                <a14:useLocalDpi xmlns:a14="http://schemas.microsoft.com/office/drawing/2010/main" val="0"/>
+              </a:ext>
+            </a:extLst>
+          </a:blip>
+          <a:stretch>
+            <a:fillRect/>
+          </a:stretch>
+        </p:blipFill>
+        <p:spPr>
+          <a:xfrm>
+            <a:off x="8314784" y="0"/>
+            <a:ext cx="3877216" cy="828791"/>
+          </a:xfrm>
+          <a:prstGeom prst="rect">
+            <a:avLst/>
+          </a:prstGeom>
+        </p:spPr>
+      </p:pic>
+      <p:sp>
+        <p:nvSpPr>
+          <p:cNvPr id="7" name="Номер слайда 6">
+            <a:extLst>
+              <a:ext uri="{FF2B5EF4-FFF2-40B4-BE49-F238E27FC236}">
+                <a16:creationId xmlns:a16="http://schemas.microsoft.com/office/drawing/2014/main" id="{25FE0626-13F9-1A33-9214-3204925D569F}"/>
+              </a:ext>
+            </a:extLst>
+          </p:cNvPr>
+          <p:cNvSpPr>
+            <a:spLocks noGrp="1"/>
+          </p:cNvSpPr>
+          <p:nvPr>
+            <p:ph type="sldNum" sz="quarter" idx="12"/>
+          </p:nvPr>
+        </p:nvSpPr>
+        <p:spPr/>
+        <p:txBody>
+          <a:bodyPr/>
+          <a:lstStyle/>
+          <a:p>
+            <a:fld id="{8CC8C628-6975-4CC2-A0F1-47F458287FF0}" type="slidenum">
+              <a:rPr lang="ru-RU" smtClean="0"/>
+              <a:t>9</a:t>
+            </a:fld>
+            <a:endParaRPr lang="ru-RU"/>
+          </a:p>
+        </p:txBody>
+      </p:sp>
+      <p:graphicFrame>
+        <p:nvGraphicFramePr>
+          <p:cNvPr id="5" name="Таблица 4">
+            <a:extLst>
+              <a:ext uri="{FF2B5EF4-FFF2-40B4-BE49-F238E27FC236}">
+                <a16:creationId xmlns:a16="http://schemas.microsoft.com/office/drawing/2014/main" id="{CFBAE33F-0CEE-DD15-224A-2110B298A21C}"/>
+              </a:ext>
+            </a:extLst>
+          </p:cNvPr>
+          <p:cNvGraphicFramePr>
+            <a:graphicFrameLocks noGrp="1"/>
+          </p:cNvGraphicFramePr>
+          <p:nvPr>
+            <p:extLst>
+              <p:ext uri="{D42A27DB-BD31-4B8C-83A1-F6EECF244321}">
+                <p14:modId xmlns:p14="http://schemas.microsoft.com/office/powerpoint/2010/main" val="2560914952"/>
+              </p:ext>
+            </p:extLst>
+          </p:nvPr>
+        </p:nvGraphicFramePr>
+        <p:xfrm>
+          <a:off x="395973" y="4410821"/>
+          <a:ext cx="2828133" cy="565685"/>
+        </p:xfrm>
+        <a:graphic>
+          <a:graphicData uri="http://schemas.openxmlformats.org/drawingml/2006/table">
+            <a:tbl>
+              <a:tblPr firstRow="1" bandRow="1">
+                <a:tableStyleId>{5C22544A-7EE6-4342-B048-85BDC9FD1C3A}</a:tableStyleId>
+              </a:tblPr>
+              <a:tblGrid>
+                <a:gridCol w="1269016">
+                  <a:extLst>
+                    <a:ext uri="{9D8B030D-6E8A-4147-A177-3AD203B41FA5}">
+                      <a16:colId xmlns:a16="http://schemas.microsoft.com/office/drawing/2014/main" val="3852776436"/>
+                    </a:ext>
+                  </a:extLst>
+                </a:gridCol>
+                <a:gridCol w="1559117">
+                  <a:extLst>
+                    <a:ext uri="{9D8B030D-6E8A-4147-A177-3AD203B41FA5}">
+                      <a16:colId xmlns:a16="http://schemas.microsoft.com/office/drawing/2014/main" val="1792951911"/>
+                    </a:ext>
+                  </a:extLst>
+                </a:gridCol>
+              </a:tblGrid>
+              <a:tr h="565685">
+                <a:tc>
+                  <a:txBody>
+                    <a:bodyPr/>
+                    <a:lstStyle/>
+                    <a:p>
+                      <a:pPr algn="ctr"/>
+                      <a:r>
+                        <a:rPr lang="ru-RU" dirty="0">
+                          <a:solidFill>
+                            <a:schemeClr val="tx1"/>
+                          </a:solidFill>
+                        </a:rPr>
+                        <a:t>Размер</a:t>
+                      </a:r>
+                    </a:p>
+                  </a:txBody>
+                  <a:tcPr anchor="ctr">
+                    <a:lnL w="12700" cap="flat" cmpd="sng" algn="ctr">
+                      <a:solidFill>
+                        <a:schemeClr val="tx1"/>
+                      </a:solidFill>
+                      <a:prstDash val="solid"/>
+                      <a:round/>
+                      <a:headEnd type="none" w="med" len="med"/>
+                      <a:tailEnd type="none" w="med" len="med"/>
+                    </a:lnL>
+                    <a:lnR w="12700" cap="flat" cmpd="sng" algn="ctr">
+                      <a:solidFill>
+                        <a:schemeClr val="tx1"/>
+                      </a:solidFill>
+                      <a:prstDash val="solid"/>
+                      <a:round/>
+                      <a:headEnd type="none" w="med" len="med"/>
+                      <a:tailEnd type="none" w="med" len="med"/>
+                    </a:lnR>
+                    <a:lnT w="12700" cap="flat" cmpd="sng" algn="ctr">
+                      <a:solidFill>
+                        <a:schemeClr val="tx1"/>
+                      </a:solidFill>
+                      <a:prstDash val="solid"/>
+                      <a:round/>
+                      <a:headEnd type="none" w="med" len="med"/>
+                      <a:tailEnd type="none" w="med" len="med"/>
+                    </a:lnT>
+                    <a:lnB w="12700" cap="flat" cmpd="sng" algn="ctr">
+                      <a:solidFill>
+                        <a:schemeClr val="tx1"/>
+                      </a:solidFill>
+                      <a:prstDash val="solid"/>
+                      <a:round/>
+                      <a:headEnd type="none" w="med" len="med"/>
+                      <a:tailEnd type="none" w="med" len="med"/>
+                    </a:lnB>
+                    <a:lnTlToBr w="12700" cmpd="sng">
+                      <a:noFill/>
+                      <a:prstDash val="solid"/>
+                    </a:lnTlToBr>
+                    <a:lnBlToTr w="12700" cmpd="sng">
+                      <a:noFill/>
+                      <a:prstDash val="solid"/>
+                    </a:lnBlToTr>
+                    <a:solidFill>
+                      <a:schemeClr val="bg1"/>
+                    </a:solidFill>
+                  </a:tcPr>
+                </a:tc>
+                <a:tc>
+                  <a:txBody>
+                    <a:bodyPr/>
+                    <a:lstStyle/>
+                    <a:p>
+                      <a:pPr marL="0" marR="0" lvl="0" indent="0" algn="ctr" defTabSz="914400" rtl="0" eaLnBrk="1" fontAlgn="auto" latinLnBrk="0" hangingPunct="1">
+                        <a:lnSpc>
+                          <a:spcPct val="100000"/>
+                        </a:lnSpc>
+                        <a:spcBef>
+                          <a:spcPts val="0"/>
+                        </a:spcBef>
+                        <a:spcAft>
+                          <a:spcPts val="0"/>
+                        </a:spcAft>
+                        <a:buClrTx/>
+                        <a:buSzTx/>
+                        <a:buFontTx/>
+                        <a:buNone/>
+                        <a:tabLst/>
+                        <a:defRPr/>
+                      </a:pPr>
+                      <a:r>
+                        <a:rPr lang="ru-RU" dirty="0">
+                          <a:solidFill>
+                            <a:schemeClr val="tx1"/>
+                          </a:solidFill>
+                        </a:rPr>
+                        <a:t>73 Кб</a:t>
+                      </a:r>
+                    </a:p>
+                  </a:txBody>
+                  <a:tcPr anchor="ctr">
+                    <a:lnL w="12700" cap="flat" cmpd="sng" algn="ctr">
+                      <a:solidFill>
+                        <a:schemeClr val="tx1"/>
+                      </a:solidFill>
+                      <a:prstDash val="solid"/>
+                      <a:round/>
+                      <a:headEnd type="none" w="med" len="med"/>
+                      <a:tailEnd type="none" w="med" len="med"/>
+                    </a:lnL>
+                    <a:lnR w="12700" cap="flat" cmpd="sng" algn="ctr">
+                      <a:solidFill>
+                        <a:schemeClr val="tx1"/>
+                      </a:solidFill>
+                      <a:prstDash val="solid"/>
+                      <a:round/>
+                      <a:headEnd type="none" w="med" len="med"/>
+                      <a:tailEnd type="none" w="med" len="med"/>
+                    </a:lnR>
+                    <a:lnT w="12700" cap="flat" cmpd="sng" algn="ctr">
+                      <a:solidFill>
+                        <a:schemeClr val="tx1"/>
+                      </a:solidFill>
+                      <a:prstDash val="solid"/>
+                      <a:round/>
+                      <a:headEnd type="none" w="med" len="med"/>
+                      <a:tailEnd type="none" w="med" len="med"/>
+                    </a:lnT>
+                    <a:lnB w="12700" cap="flat" cmpd="sng" algn="ctr">
+                      <a:solidFill>
+                        <a:schemeClr val="tx1"/>
+                      </a:solidFill>
+                      <a:prstDash val="solid"/>
+                      <a:round/>
+                      <a:headEnd type="none" w="med" len="med"/>
+                      <a:tailEnd type="none" w="med" len="med"/>
+                    </a:lnB>
+                    <a:lnTlToBr w="12700" cmpd="sng">
+                      <a:noFill/>
+                      <a:prstDash val="solid"/>
+                    </a:lnTlToBr>
+                    <a:lnBlToTr w="12700" cmpd="sng">
+                      <a:noFill/>
+                      <a:prstDash val="solid"/>
+                    </a:lnBlToTr>
+                    <a:solidFill>
+                      <a:schemeClr val="bg1"/>
+                    </a:solidFill>
+                  </a:tcPr>
+                </a:tc>
+                <a:extLst>
+                  <a:ext uri="{0D108BD9-81ED-4DB2-BD59-A6C34878D82A}">
+                    <a16:rowId xmlns:a16="http://schemas.microsoft.com/office/drawing/2014/main" val="1488891872"/>
+                  </a:ext>
+                </a:extLst>
+              </a:tr>
+            </a:tbl>
+          </a:graphicData>
+        </a:graphic>
+      </p:graphicFrame>
+      <p:graphicFrame>
+        <p:nvGraphicFramePr>
+          <p:cNvPr id="8" name="Таблица 7">
+            <a:extLst>
+              <a:ext uri="{FF2B5EF4-FFF2-40B4-BE49-F238E27FC236}">
+                <a16:creationId xmlns:a16="http://schemas.microsoft.com/office/drawing/2014/main" id="{73A89171-14E4-3559-0100-C807D4988F75}"/>
+              </a:ext>
+            </a:extLst>
+          </p:cNvPr>
+          <p:cNvGraphicFramePr>
+            <a:graphicFrameLocks noGrp="1"/>
+          </p:cNvGraphicFramePr>
+          <p:nvPr>
+            <p:extLst>
+              <p:ext uri="{D42A27DB-BD31-4B8C-83A1-F6EECF244321}">
+                <p14:modId xmlns:p14="http://schemas.microsoft.com/office/powerpoint/2010/main" val="2561587389"/>
+              </p:ext>
+            </p:extLst>
+          </p:nvPr>
+        </p:nvGraphicFramePr>
+        <p:xfrm>
+          <a:off x="395973" y="5400195"/>
+          <a:ext cx="2828133" cy="565685"/>
+        </p:xfrm>
+        <a:graphic>
+          <a:graphicData uri="http://schemas.openxmlformats.org/drawingml/2006/table">
+            <a:tbl>
+              <a:tblPr firstRow="1" bandRow="1">
+                <a:tableStyleId>{5C22544A-7EE6-4342-B048-85BDC9FD1C3A}</a:tableStyleId>
+              </a:tblPr>
+              <a:tblGrid>
+                <a:gridCol w="1269016">
+                  <a:extLst>
+                    <a:ext uri="{9D8B030D-6E8A-4147-A177-3AD203B41FA5}">
+                      <a16:colId xmlns:a16="http://schemas.microsoft.com/office/drawing/2014/main" val="3852776436"/>
+                    </a:ext>
+                  </a:extLst>
+                </a:gridCol>
+                <a:gridCol w="1559117">
+                  <a:extLst>
+                    <a:ext uri="{9D8B030D-6E8A-4147-A177-3AD203B41FA5}">
+                      <a16:colId xmlns:a16="http://schemas.microsoft.com/office/drawing/2014/main" val="1792951911"/>
+                    </a:ext>
+                  </a:extLst>
+                </a:gridCol>
+              </a:tblGrid>
+              <a:tr h="565685">
+                <a:tc>
+                  <a:txBody>
+                    <a:bodyPr/>
+                    <a:lstStyle/>
+                    <a:p>
+                      <a:pPr algn="ctr"/>
+                      <a:r>
+                        <a:rPr lang="ru-RU" dirty="0">
+                          <a:solidFill>
+                            <a:schemeClr val="tx1"/>
+                          </a:solidFill>
+                        </a:rPr>
+                        <a:t>Энтропия</a:t>
+                      </a:r>
+                    </a:p>
+                  </a:txBody>
+                  <a:tcPr anchor="ctr">
+                    <a:lnL w="12700" cap="flat" cmpd="sng" algn="ctr">
+                      <a:solidFill>
+                        <a:schemeClr val="tx1"/>
+                      </a:solidFill>
+                      <a:prstDash val="solid"/>
+                      <a:round/>
+                      <a:headEnd type="none" w="med" len="med"/>
+                      <a:tailEnd type="none" w="med" len="med"/>
+                    </a:lnL>
+                    <a:lnR w="12700" cap="flat" cmpd="sng" algn="ctr">
+                      <a:solidFill>
+                        <a:schemeClr val="tx1"/>
+                      </a:solidFill>
+                      <a:prstDash val="solid"/>
+                      <a:round/>
+                      <a:headEnd type="none" w="med" len="med"/>
+                      <a:tailEnd type="none" w="med" len="med"/>
+                    </a:lnR>
+                    <a:lnT w="12700" cap="flat" cmpd="sng" algn="ctr">
+                      <a:solidFill>
+                        <a:schemeClr val="tx1"/>
+                      </a:solidFill>
+                      <a:prstDash val="solid"/>
+                      <a:round/>
+                      <a:headEnd type="none" w="med" len="med"/>
+                      <a:tailEnd type="none" w="med" len="med"/>
+                    </a:lnT>
+                    <a:lnB w="12700" cap="flat" cmpd="sng" algn="ctr">
+                      <a:solidFill>
+                        <a:schemeClr val="tx1"/>
+                      </a:solidFill>
+                      <a:prstDash val="solid"/>
+                      <a:round/>
+                      <a:headEnd type="none" w="med" len="med"/>
+                      <a:tailEnd type="none" w="med" len="med"/>
+                    </a:lnB>
+                    <a:lnTlToBr w="12700" cmpd="sng">
+                      <a:noFill/>
+                      <a:prstDash val="solid"/>
+                    </a:lnTlToBr>
+                    <a:lnBlToTr w="12700" cmpd="sng">
+                      <a:noFill/>
+                      <a:prstDash val="solid"/>
+                    </a:lnBlToTr>
+                    <a:solidFill>
+                      <a:schemeClr val="bg1"/>
+                    </a:solidFill>
+                  </a:tcPr>
+                </a:tc>
+                <a:tc>
+                  <a:txBody>
+                    <a:bodyPr/>
+                    <a:lstStyle/>
+                    <a:p>
+                      <a:pPr marL="0" marR="0" lvl="0" indent="0" algn="ctr" defTabSz="914400" rtl="0" eaLnBrk="1" fontAlgn="auto" latinLnBrk="0" hangingPunct="1">
+                        <a:lnSpc>
+                          <a:spcPct val="100000"/>
+                        </a:lnSpc>
+                        <a:spcBef>
+                          <a:spcPts val="0"/>
+                        </a:spcBef>
+                        <a:spcAft>
+                          <a:spcPts val="0"/>
+                        </a:spcAft>
+                        <a:buClrTx/>
+                        <a:buSzTx/>
+                        <a:buFontTx/>
+                        <a:buNone/>
+                        <a:tabLst/>
+                        <a:defRPr/>
+                      </a:pPr>
+                      <a:r>
+                        <a:rPr lang="ru-RU" dirty="0">
+                          <a:solidFill>
+                            <a:schemeClr val="tx1"/>
+                          </a:solidFill>
+                        </a:rPr>
+                        <a:t>7.97</a:t>
+                      </a:r>
+                    </a:p>
+                  </a:txBody>
+                  <a:tcPr anchor="ctr">
+                    <a:lnL w="12700" cap="flat" cmpd="sng" algn="ctr">
+                      <a:solidFill>
+                        <a:schemeClr val="tx1"/>
+                      </a:solidFill>
+                      <a:prstDash val="solid"/>
+                      <a:round/>
+                      <a:headEnd type="none" w="med" len="med"/>
+                      <a:tailEnd type="none" w="med" len="med"/>
+                    </a:lnL>
+                    <a:lnR w="12700" cap="flat" cmpd="sng" algn="ctr">
+                      <a:solidFill>
+                        <a:schemeClr val="tx1"/>
+                      </a:solidFill>
+                      <a:prstDash val="solid"/>
+                      <a:round/>
+                      <a:headEnd type="none" w="med" len="med"/>
+                      <a:tailEnd type="none" w="med" len="med"/>
+                    </a:lnR>
+                    <a:lnT w="12700" cap="flat" cmpd="sng" algn="ctr">
+                      <a:solidFill>
+                        <a:schemeClr val="tx1"/>
+                      </a:solidFill>
+                      <a:prstDash val="solid"/>
+                      <a:round/>
+                      <a:headEnd type="none" w="med" len="med"/>
+                      <a:tailEnd type="none" w="med" len="med"/>
+                    </a:lnT>
+                    <a:lnB w="12700" cap="flat" cmpd="sng" algn="ctr">
+                      <a:solidFill>
+                        <a:schemeClr val="tx1"/>
+                      </a:solidFill>
+                      <a:prstDash val="solid"/>
+                      <a:round/>
+                      <a:headEnd type="none" w="med" len="med"/>
+                      <a:tailEnd type="none" w="med" len="med"/>
+                    </a:lnB>
+                    <a:lnTlToBr w="12700" cmpd="sng">
+                      <a:noFill/>
+                      <a:prstDash val="solid"/>
+                    </a:lnTlToBr>
+                    <a:lnBlToTr w="12700" cmpd="sng">
+                      <a:noFill/>
+                      <a:prstDash val="solid"/>
+                    </a:lnBlToTr>
+                    <a:solidFill>
+                      <a:schemeClr val="bg1"/>
+                    </a:solidFill>
+                  </a:tcPr>
+                </a:tc>
+                <a:extLst>
+                  <a:ext uri="{0D108BD9-81ED-4DB2-BD59-A6C34878D82A}">
+                    <a16:rowId xmlns:a16="http://schemas.microsoft.com/office/drawing/2014/main" val="1488891872"/>
+                  </a:ext>
+                </a:extLst>
+              </a:tr>
+            </a:tbl>
+          </a:graphicData>
+        </a:graphic>
+      </p:graphicFrame>
+      <p:sp>
+        <p:nvSpPr>
+          <p:cNvPr id="9" name="TextBox 8">
+            <a:extLst>
+              <a:ext uri="{FF2B5EF4-FFF2-40B4-BE49-F238E27FC236}">
+                <a16:creationId xmlns:a16="http://schemas.microsoft.com/office/drawing/2014/main" id="{C48307A4-8A0E-0D76-9770-AA477F3B1E62}"/>
+              </a:ext>
+            </a:extLst>
+          </p:cNvPr>
+          <p:cNvSpPr txBox="1"/>
+          <p:nvPr/>
+        </p:nvSpPr>
+        <p:spPr>
+          <a:xfrm>
+            <a:off x="232597" y="204026"/>
+            <a:ext cx="8606727" cy="954107"/>
+          </a:xfrm>
+          <a:prstGeom prst="rect">
+            <a:avLst/>
+          </a:prstGeom>
+          <a:noFill/>
+        </p:spPr>
+        <p:txBody>
+          <a:bodyPr wrap="square">
+            <a:spAutoFit/>
+          </a:bodyPr>
+          <a:lstStyle/>
+          <a:p>
+            <a:r>
+              <a:rPr lang="en-US" sz="2800" dirty="0"/>
+              <a:t>Гистограмма </a:t>
+            </a:r>
+            <a:r>
+              <a:rPr lang="ru-RU" sz="2800" dirty="0"/>
+              <a:t>распределения значений</a:t>
+            </a:r>
+            <a:r>
+              <a:rPr lang="en-US" sz="2800" dirty="0"/>
+              <a:t> </a:t>
+            </a:r>
+            <a:r>
+              <a:rPr lang="ru-RU" sz="2800" dirty="0"/>
+              <a:t>изображения обложки книги в формате</a:t>
+            </a:r>
+            <a:r>
+              <a:rPr lang="en-US" sz="2800" dirty="0"/>
+              <a:t> jpg</a:t>
+            </a:r>
+            <a:r>
+              <a:rPr lang="ru-RU" sz="2800" dirty="0"/>
+              <a:t>  и сжатая </a:t>
+            </a:r>
+            <a:r>
+              <a:rPr lang="en-US" sz="2800" dirty="0"/>
+              <a:t>jpg</a:t>
+            </a:r>
+            <a:endParaRPr lang="ru-RU" sz="2800" dirty="0"/>
+          </a:p>
+        </p:txBody>
+      </p:sp>
+      <p:pic>
+        <p:nvPicPr>
+          <p:cNvPr id="4" name="Рисунок 3">
+            <a:extLst>
+              <a:ext uri="{FF2B5EF4-FFF2-40B4-BE49-F238E27FC236}">
+                <a16:creationId xmlns:a16="http://schemas.microsoft.com/office/drawing/2014/main" id="{A2A3BF04-D17A-2C3E-3CA1-32985ED418C6}"/>
+              </a:ext>
+            </a:extLst>
+          </p:cNvPr>
+          <p:cNvPicPr>
+            <a:picLocks noChangeAspect="1"/>
+          </p:cNvPicPr>
+          <p:nvPr/>
+        </p:nvPicPr>
+        <p:blipFill>
+          <a:blip r:embed="rId3">
+            <a:extLst>
+              <a:ext uri="{28A0092B-C50C-407E-A947-70E740481C1C}">
+                <a14:useLocalDpi xmlns:a14="http://schemas.microsoft.com/office/drawing/2010/main" val="0"/>
+              </a:ext>
+            </a:extLst>
+          </a:blip>
+          <a:stretch>
+            <a:fillRect/>
+          </a:stretch>
+        </p:blipFill>
+        <p:spPr>
+          <a:xfrm>
+            <a:off x="0" y="1677533"/>
+            <a:ext cx="8622485" cy="1907280"/>
+          </a:xfrm>
+          <a:prstGeom prst="rect">
+            <a:avLst/>
+          </a:prstGeom>
+        </p:spPr>
+      </p:pic>
+      <p:pic>
+        <p:nvPicPr>
+          <p:cNvPr id="12" name="Рисунок 11" descr="Изображение выглядит как снимок экрана, Графическое программное обеспечение, Мультимедийное программное обеспечение, Редактирование&#10;&#10;Содержимое, созданное искусственным интеллектом, может быть неверным.">
+            <a:extLst>
+              <a:ext uri="{FF2B5EF4-FFF2-40B4-BE49-F238E27FC236}">
+                <a16:creationId xmlns:a16="http://schemas.microsoft.com/office/drawing/2014/main" id="{1CAAA2A3-D311-8E37-1FF0-54FAB971D9B3}"/>
+              </a:ext>
+            </a:extLst>
+          </p:cNvPr>
+          <p:cNvPicPr>
+            <a:picLocks noChangeAspect="1"/>
+          </p:cNvPicPr>
+          <p:nvPr/>
+        </p:nvPicPr>
+        <p:blipFill>
+          <a:blip r:embed="rId4"/>
+          <a:stretch>
+            <a:fillRect/>
+          </a:stretch>
+        </p:blipFill>
+        <p:spPr>
+          <a:xfrm>
+            <a:off x="3581400" y="4347122"/>
+            <a:ext cx="8610600" cy="1999126"/>
+          </a:xfrm>
+          <a:prstGeom prst="rect">
+            <a:avLst/>
+          </a:prstGeom>
+        </p:spPr>
+      </p:pic>
+    </p:spTree>
+    <p:extLst>
+      <p:ext uri="{BB962C8B-B14F-4D97-AF65-F5344CB8AC3E}">
+        <p14:creationId xmlns:p14="http://schemas.microsoft.com/office/powerpoint/2010/main" val="1597462497"/>
       </p:ext>
     </p:extLst>
   </p:cSld>
